--- a/output_pptx/God_I_Look_to_You.pptx
+++ b/output_pptx/God_I_Look_to_You.pptx
@@ -3118,23 +3118,23 @@
         </p:nvSpPr>
         <p:spPr>
           <a:xfrm>
-            <a:off x="594360" y="1837944"/>
-            <a:ext cx="11002975" cy="685800"/>
-          </a:xfrm>
-          <a:prstGeom prst="rect">
-            <a:avLst/>
-          </a:prstGeom>
-          <a:noFill/>
-        </p:spPr>
-        <p:txBody>
-          <a:bodyPr wrap="square">
-            <a:spAutoFit/>
-          </a:bodyPr>
-          <a:lstStyle/>
-          <a:p>
-            <a:pPr algn="ctr"/>
-            <a:r>
-              <a:rPr sz="4400" b="1" i="0">
+            <a:off x="640080" y="1650492"/>
+            <a:ext cx="10911535" cy="731520"/>
+          </a:xfrm>
+          <a:prstGeom prst="rect">
+            <a:avLst/>
+          </a:prstGeom>
+          <a:noFill/>
+        </p:spPr>
+        <p:txBody>
+          <a:bodyPr wrap="square">
+            <a:spAutoFit/>
+          </a:bodyPr>
+          <a:lstStyle/>
+          <a:p>
+            <a:pPr algn="ctr"/>
+            <a:r>
+              <a:rPr sz="4800" b="1" i="0">
                 <a:solidFill>
                   <a:srgbClr val="FFFFFF"/>
                 </a:solidFill>
@@ -3153,8 +3153,8 @@
         </p:nvSpPr>
         <p:spPr>
           <a:xfrm>
-            <a:off x="594360" y="2560320"/>
-            <a:ext cx="11002975" cy="384048"/>
+            <a:off x="640080" y="2418588"/>
+            <a:ext cx="10911535" cy="365760"/>
           </a:xfrm>
           <a:prstGeom prst="rect">
             <a:avLst/>
@@ -3171,7 +3171,7 @@
             <a:r>
               <a:rPr sz="2400" b="0" i="1">
                 <a:solidFill>
-                  <a:srgbClr val="B4B4B4"/>
+                  <a:srgbClr val="AAAAAA"/>
                 </a:solidFill>
                 <a:latin typeface="Arial"/>
               </a:rPr>
@@ -3188,8 +3188,78 @@
         </p:nvSpPr>
         <p:spPr>
           <a:xfrm>
-            <a:off x="594360" y="2980944"/>
-            <a:ext cx="11002975" cy="347472"/>
+            <a:off x="640080" y="2985516"/>
+            <a:ext cx="10911535" cy="731520"/>
+          </a:xfrm>
+          <a:prstGeom prst="rect">
+            <a:avLst/>
+          </a:prstGeom>
+          <a:noFill/>
+        </p:spPr>
+        <p:txBody>
+          <a:bodyPr wrap="square">
+            <a:spAutoFit/>
+          </a:bodyPr>
+          <a:lstStyle/>
+          <a:p>
+            <a:pPr algn="ctr"/>
+            <a:r>
+              <a:rPr sz="4800" b="1" i="0">
+                <a:solidFill>
+                  <a:srgbClr val="FFFFFF"/>
+                </a:solidFill>
+                <a:latin typeface="Arial"/>
+              </a:rPr>
+              <a:t>何にも          縛られない</a:t>
+            </a:r>
+          </a:p>
+        </p:txBody>
+      </p:sp>
+      <p:sp>
+        <p:nvSpPr>
+          <p:cNvPr id="5" name="TextBox 4"/>
+          <p:cNvSpPr txBox="1"/>
+          <p:nvPr/>
+        </p:nvSpPr>
+        <p:spPr>
+          <a:xfrm>
+            <a:off x="640080" y="3753612"/>
+            <a:ext cx="10911535" cy="365760"/>
+          </a:xfrm>
+          <a:prstGeom prst="rect">
+            <a:avLst/>
+          </a:prstGeom>
+          <a:noFill/>
+        </p:spPr>
+        <p:txBody>
+          <a:bodyPr wrap="square">
+            <a:spAutoFit/>
+          </a:bodyPr>
+          <a:lstStyle/>
+          <a:p>
+            <a:pPr algn="ctr"/>
+            <a:r>
+              <a:rPr sz="2400" b="0" i="1">
+                <a:solidFill>
+                  <a:srgbClr val="AAAAAA"/>
+                </a:solidFill>
+                <a:latin typeface="Arial"/>
+              </a:rPr>
+              <a:t>nani ni mo   shibararenai</a:t>
+            </a:r>
+          </a:p>
+        </p:txBody>
+      </p:sp>
+      <p:sp>
+        <p:nvSpPr>
+          <p:cNvPr id="6" name="TextBox 5"/>
+          <p:cNvSpPr txBox="1"/>
+          <p:nvPr/>
+        </p:nvSpPr>
+        <p:spPr>
+          <a:xfrm>
+            <a:off x="640080" y="4530852"/>
+            <a:ext cx="10911535" cy="310896"/>
           </a:xfrm>
           <a:prstGeom prst="rect">
             <a:avLst/>
@@ -3206,81 +3276,11 @@
             <a:r>
               <a:rPr sz="2000" b="0" i="1">
                 <a:solidFill>
-                  <a:srgbClr val="8C8C8C"/>
-                </a:solidFill>
-                <a:latin typeface="Arial"/>
-              </a:rPr>
-              <a:t/>
-            </a:r>
-          </a:p>
-        </p:txBody>
-      </p:sp>
-      <p:sp>
-        <p:nvSpPr>
-          <p:cNvPr id="5" name="TextBox 4"/>
-          <p:cNvSpPr txBox="1"/>
-          <p:nvPr/>
-        </p:nvSpPr>
-        <p:spPr>
-          <a:xfrm>
-            <a:off x="594360" y="3529584"/>
-            <a:ext cx="11002975" cy="685800"/>
-          </a:xfrm>
-          <a:prstGeom prst="rect">
-            <a:avLst/>
-          </a:prstGeom>
-          <a:noFill/>
-        </p:spPr>
-        <p:txBody>
-          <a:bodyPr wrap="square">
-            <a:spAutoFit/>
-          </a:bodyPr>
-          <a:lstStyle/>
-          <a:p>
-            <a:pPr algn="ctr"/>
-            <a:r>
-              <a:rPr sz="4400" b="1" i="0">
-                <a:solidFill>
-                  <a:srgbClr val="FFFFFF"/>
-                </a:solidFill>
-                <a:latin typeface="Arial"/>
-              </a:rPr>
-              <a:t>何にも          縛られない</a:t>
-            </a:r>
-          </a:p>
-        </p:txBody>
-      </p:sp>
-      <p:sp>
-        <p:nvSpPr>
-          <p:cNvPr id="6" name="TextBox 5"/>
-          <p:cNvSpPr txBox="1"/>
-          <p:nvPr/>
-        </p:nvSpPr>
-        <p:spPr>
-          <a:xfrm>
-            <a:off x="594360" y="4251960"/>
-            <a:ext cx="11002975" cy="384048"/>
-          </a:xfrm>
-          <a:prstGeom prst="rect">
-            <a:avLst/>
-          </a:prstGeom>
-          <a:noFill/>
-        </p:spPr>
-        <p:txBody>
-          <a:bodyPr wrap="square">
-            <a:spAutoFit/>
-          </a:bodyPr>
-          <a:lstStyle/>
-          <a:p>
-            <a:pPr algn="ctr"/>
-            <a:r>
-              <a:rPr sz="2400" b="0" i="1">
-                <a:solidFill>
-                  <a:srgbClr val="B4B4B4"/>
-                </a:solidFill>
-                <a:latin typeface="Arial"/>
-              </a:rPr>
-              <a:t>nani ni mo   shibararenai</a:t>
+                  <a:srgbClr val="828282"/>
+                </a:solidFill>
+                <a:latin typeface="Arial"/>
+              </a:rPr>
+              <a:t>Deus, Eu Olho Para Ti</a:t>
             </a:r>
           </a:p>
         </p:txBody>
@@ -3293,8 +3293,8 @@
         </p:nvSpPr>
         <p:spPr>
           <a:xfrm>
-            <a:off x="594360" y="4672584"/>
-            <a:ext cx="11002975" cy="347472"/>
+            <a:off x="640080" y="4896612"/>
+            <a:ext cx="10911535" cy="310896"/>
           </a:xfrm>
           <a:prstGeom prst="rect">
             <a:avLst/>
@@ -3311,11 +3311,11 @@
             <a:r>
               <a:rPr sz="2000" b="0" i="1">
                 <a:solidFill>
-                  <a:srgbClr val="8C8C8C"/>
-                </a:solidFill>
-                <a:latin typeface="Arial"/>
-              </a:rPr>
-              <a:t/>
+                  <a:srgbClr val="828282"/>
+                </a:solidFill>
+                <a:latin typeface="Arial"/>
+              </a:rPr>
+              <a:t>Deus, eu olho para Ti, eu não vou ser tragado</a:t>
             </a:r>
           </a:p>
         </p:txBody>
@@ -3354,23 +3354,23 @@
         </p:nvSpPr>
         <p:spPr>
           <a:xfrm>
-            <a:off x="594360" y="1837944"/>
-            <a:ext cx="11002975" cy="685800"/>
-          </a:xfrm>
-          <a:prstGeom prst="rect">
-            <a:avLst/>
-          </a:prstGeom>
-          <a:noFill/>
-        </p:spPr>
-        <p:txBody>
-          <a:bodyPr wrap="square">
-            <a:spAutoFit/>
-          </a:bodyPr>
-          <a:lstStyle/>
-          <a:p>
-            <a:pPr algn="ctr"/>
-            <a:r>
-              <a:rPr sz="4400" b="1" i="0">
+            <a:off x="640080" y="1650492"/>
+            <a:ext cx="10911535" cy="731520"/>
+          </a:xfrm>
+          <a:prstGeom prst="rect">
+            <a:avLst/>
+          </a:prstGeom>
+          <a:noFill/>
+        </p:spPr>
+        <p:txBody>
+          <a:bodyPr wrap="square">
+            <a:spAutoFit/>
+          </a:bodyPr>
+          <a:lstStyle/>
+          <a:p>
+            <a:pPr algn="ctr"/>
+            <a:r>
+              <a:rPr sz="4800" b="1" i="0">
                 <a:solidFill>
                   <a:srgbClr val="FFFFFF"/>
                 </a:solidFill>
@@ -3389,8 +3389,8 @@
         </p:nvSpPr>
         <p:spPr>
           <a:xfrm>
-            <a:off x="594360" y="2560320"/>
-            <a:ext cx="11002975" cy="384048"/>
+            <a:off x="640080" y="2418588"/>
+            <a:ext cx="10911535" cy="365760"/>
           </a:xfrm>
           <a:prstGeom prst="rect">
             <a:avLst/>
@@ -3407,7 +3407,7 @@
             <a:r>
               <a:rPr sz="2400" b="0" i="1">
                 <a:solidFill>
-                  <a:srgbClr val="B4B4B4"/>
+                  <a:srgbClr val="AAAAAA"/>
                 </a:solidFill>
                 <a:latin typeface="Arial"/>
               </a:rPr>
@@ -3424,8 +3424,78 @@
         </p:nvSpPr>
         <p:spPr>
           <a:xfrm>
-            <a:off x="594360" y="2980944"/>
-            <a:ext cx="11002975" cy="347472"/>
+            <a:off x="640080" y="2985516"/>
+            <a:ext cx="10911535" cy="731520"/>
+          </a:xfrm>
+          <a:prstGeom prst="rect">
+            <a:avLst/>
+          </a:prstGeom>
+          <a:noFill/>
+        </p:spPr>
+        <p:txBody>
+          <a:bodyPr wrap="square">
+            <a:spAutoFit/>
+          </a:bodyPr>
+          <a:lstStyle/>
+          <a:p>
+            <a:pPr algn="ctr"/>
+            <a:r>
+              <a:rPr sz="4800" b="1" i="0">
+                <a:solidFill>
+                  <a:srgbClr val="FFFFFF"/>
+                </a:solidFill>
+                <a:latin typeface="Arial"/>
+              </a:rPr>
+              <a:t>助けは　    主にあるから</a:t>
+            </a:r>
+          </a:p>
+        </p:txBody>
+      </p:sp>
+      <p:sp>
+        <p:nvSpPr>
+          <p:cNvPr id="5" name="TextBox 4"/>
+          <p:cNvSpPr txBox="1"/>
+          <p:nvPr/>
+        </p:nvSpPr>
+        <p:spPr>
+          <a:xfrm>
+            <a:off x="640080" y="3753612"/>
+            <a:ext cx="10911535" cy="365760"/>
+          </a:xfrm>
+          <a:prstGeom prst="rect">
+            <a:avLst/>
+          </a:prstGeom>
+          <a:noFill/>
+        </p:spPr>
+        <p:txBody>
+          <a:bodyPr wrap="square">
+            <a:spAutoFit/>
+          </a:bodyPr>
+          <a:lstStyle/>
+          <a:p>
+            <a:pPr algn="ctr"/>
+            <a:r>
+              <a:rPr sz="2400" b="0" i="1">
+                <a:solidFill>
+                  <a:srgbClr val="AAAAAA"/>
+                </a:solidFill>
+                <a:latin typeface="Arial"/>
+              </a:rPr>
+              <a:t>tasuke wa  shu ni aru kara</a:t>
+            </a:r>
+          </a:p>
+        </p:txBody>
+      </p:sp>
+      <p:sp>
+        <p:nvSpPr>
+          <p:cNvPr id="6" name="TextBox 5"/>
+          <p:cNvSpPr txBox="1"/>
+          <p:nvPr/>
+        </p:nvSpPr>
+        <p:spPr>
+          <a:xfrm>
+            <a:off x="640080" y="4530852"/>
+            <a:ext cx="10911535" cy="310896"/>
           </a:xfrm>
           <a:prstGeom prst="rect">
             <a:avLst/>
@@ -3442,81 +3512,11 @@
             <a:r>
               <a:rPr sz="2000" b="0" i="1">
                 <a:solidFill>
-                  <a:srgbClr val="8C8C8C"/>
-                </a:solidFill>
-                <a:latin typeface="Arial"/>
-              </a:rPr>
-              <a:t/>
-            </a:r>
-          </a:p>
-        </p:txBody>
-      </p:sp>
-      <p:sp>
-        <p:nvSpPr>
-          <p:cNvPr id="5" name="TextBox 4"/>
-          <p:cNvSpPr txBox="1"/>
-          <p:nvPr/>
-        </p:nvSpPr>
-        <p:spPr>
-          <a:xfrm>
-            <a:off x="594360" y="3529584"/>
-            <a:ext cx="11002975" cy="685800"/>
-          </a:xfrm>
-          <a:prstGeom prst="rect">
-            <a:avLst/>
-          </a:prstGeom>
-          <a:noFill/>
-        </p:spPr>
-        <p:txBody>
-          <a:bodyPr wrap="square">
-            <a:spAutoFit/>
-          </a:bodyPr>
-          <a:lstStyle/>
-          <a:p>
-            <a:pPr algn="ctr"/>
-            <a:r>
-              <a:rPr sz="4400" b="1" i="0">
-                <a:solidFill>
-                  <a:srgbClr val="FFFFFF"/>
-                </a:solidFill>
-                <a:latin typeface="Arial"/>
-              </a:rPr>
-              <a:t>助けは　    主にあるから</a:t>
-            </a:r>
-          </a:p>
-        </p:txBody>
-      </p:sp>
-      <p:sp>
-        <p:nvSpPr>
-          <p:cNvPr id="6" name="TextBox 5"/>
-          <p:cNvSpPr txBox="1"/>
-          <p:nvPr/>
-        </p:nvSpPr>
-        <p:spPr>
-          <a:xfrm>
-            <a:off x="594360" y="4251960"/>
-            <a:ext cx="11002975" cy="384048"/>
-          </a:xfrm>
-          <a:prstGeom prst="rect">
-            <a:avLst/>
-          </a:prstGeom>
-          <a:noFill/>
-        </p:spPr>
-        <p:txBody>
-          <a:bodyPr wrap="square">
-            <a:spAutoFit/>
-          </a:bodyPr>
-          <a:lstStyle/>
-          <a:p>
-            <a:pPr algn="ctr"/>
-            <a:r>
-              <a:rPr sz="2400" b="0" i="1">
-                <a:solidFill>
-                  <a:srgbClr val="B4B4B4"/>
-                </a:solidFill>
-                <a:latin typeface="Arial"/>
-              </a:rPr>
-              <a:t>tasuke wa  shu ni aru kara</a:t>
+                  <a:srgbClr val="828282"/>
+                </a:solidFill>
+                <a:latin typeface="Arial"/>
+              </a:rPr>
+              <a:t>Dá-me visão para ver as coisas como Tu vês</a:t>
             </a:r>
           </a:p>
         </p:txBody>
@@ -3529,8 +3529,8 @@
         </p:nvSpPr>
         <p:spPr>
           <a:xfrm>
-            <a:off x="594360" y="4672584"/>
-            <a:ext cx="11002975" cy="347472"/>
+            <a:off x="640080" y="4896612"/>
+            <a:ext cx="10911535" cy="310896"/>
           </a:xfrm>
           <a:prstGeom prst="rect">
             <a:avLst/>
@@ -3547,11 +3547,11 @@
             <a:r>
               <a:rPr sz="2000" b="0" i="1">
                 <a:solidFill>
-                  <a:srgbClr val="8C8C8C"/>
-                </a:solidFill>
-                <a:latin typeface="Arial"/>
-              </a:rPr>
-              <a:t/>
+                  <a:srgbClr val="828282"/>
+                </a:solidFill>
+                <a:latin typeface="Arial"/>
+              </a:rPr>
+              <a:t>Deus, eu olho para Ti</a:t>
             </a:r>
           </a:p>
         </p:txBody>
@@ -3590,23 +3590,23 @@
         </p:nvSpPr>
         <p:spPr>
           <a:xfrm>
-            <a:off x="594360" y="1837944"/>
-            <a:ext cx="11002975" cy="685800"/>
-          </a:xfrm>
-          <a:prstGeom prst="rect">
-            <a:avLst/>
-          </a:prstGeom>
-          <a:noFill/>
-        </p:spPr>
-        <p:txBody>
-          <a:bodyPr wrap="square">
-            <a:spAutoFit/>
-          </a:bodyPr>
-          <a:lstStyle/>
-          <a:p>
-            <a:pPr algn="ctr"/>
-            <a:r>
-              <a:rPr sz="4400" b="1" i="0">
+            <a:off x="640080" y="1650492"/>
+            <a:ext cx="10911535" cy="731520"/>
+          </a:xfrm>
+          <a:prstGeom prst="rect">
+            <a:avLst/>
+          </a:prstGeom>
+          <a:noFill/>
+        </p:spPr>
+        <p:txBody>
+          <a:bodyPr wrap="square">
+            <a:spAutoFit/>
+          </a:bodyPr>
+          <a:lstStyle/>
+          <a:p>
+            <a:pPr algn="ctr"/>
+            <a:r>
+              <a:rPr sz="4800" b="1" i="0">
                 <a:solidFill>
                   <a:srgbClr val="FFFFFF"/>
                 </a:solidFill>
@@ -3625,8 +3625,8 @@
         </p:nvSpPr>
         <p:spPr>
           <a:xfrm>
-            <a:off x="594360" y="2560320"/>
-            <a:ext cx="11002975" cy="384048"/>
+            <a:off x="640080" y="2418588"/>
+            <a:ext cx="10911535" cy="365760"/>
           </a:xfrm>
           <a:prstGeom prst="rect">
             <a:avLst/>
@@ -3643,7 +3643,7 @@
             <a:r>
               <a:rPr sz="2400" b="0" i="1">
                 <a:solidFill>
-                  <a:srgbClr val="B4B4B4"/>
+                  <a:srgbClr val="AAAAAA"/>
                 </a:solidFill>
                 <a:latin typeface="Arial"/>
               </a:rPr>
@@ -3660,8 +3660,78 @@
         </p:nvSpPr>
         <p:spPr>
           <a:xfrm>
-            <a:off x="594360" y="2980944"/>
-            <a:ext cx="11002975" cy="347472"/>
+            <a:off x="640080" y="2985516"/>
+            <a:ext cx="10911535" cy="731520"/>
+          </a:xfrm>
+          <a:prstGeom prst="rect">
+            <a:avLst/>
+          </a:prstGeom>
+          <a:noFill/>
+        </p:spPr>
+        <p:txBody>
+          <a:bodyPr wrap="square">
+            <a:spAutoFit/>
+          </a:bodyPr>
+          <a:lstStyle/>
+          <a:p>
+            <a:pPr algn="ctr"/>
+            <a:r>
+              <a:rPr sz="4800" b="1" i="0">
+                <a:solidFill>
+                  <a:srgbClr val="FFFFFF"/>
+                </a:solidFill>
+                <a:latin typeface="Arial"/>
+              </a:rPr>
+              <a:t>永遠に変わーらない  神を　愛します</a:t>
+            </a:r>
+          </a:p>
+        </p:txBody>
+      </p:sp>
+      <p:sp>
+        <p:nvSpPr>
+          <p:cNvPr id="5" name="TextBox 4"/>
+          <p:cNvSpPr txBox="1"/>
+          <p:nvPr/>
+        </p:nvSpPr>
+        <p:spPr>
+          <a:xfrm>
+            <a:off x="640080" y="3753612"/>
+            <a:ext cx="10911535" cy="365760"/>
+          </a:xfrm>
+          <a:prstGeom prst="rect">
+            <a:avLst/>
+          </a:prstGeom>
+          <a:noFill/>
+        </p:spPr>
+        <p:txBody>
+          <a:bodyPr wrap="square">
+            <a:spAutoFit/>
+          </a:bodyPr>
+          <a:lstStyle/>
+          <a:p>
+            <a:pPr algn="ctr"/>
+            <a:r>
+              <a:rPr sz="2400" b="0" i="1">
+                <a:solidFill>
+                  <a:srgbClr val="AAAAAA"/>
+                </a:solidFill>
+                <a:latin typeface="Arial"/>
+              </a:rPr>
+              <a:t>eie-n ni kawa--ranai kami wo   ai shimasu</a:t>
+            </a:r>
+          </a:p>
+        </p:txBody>
+      </p:sp>
+      <p:sp>
+        <p:nvSpPr>
+          <p:cNvPr id="6" name="TextBox 5"/>
+          <p:cNvSpPr txBox="1"/>
+          <p:nvPr/>
+        </p:nvSpPr>
+        <p:spPr>
+          <a:xfrm>
+            <a:off x="640080" y="4530852"/>
+            <a:ext cx="10911535" cy="310896"/>
           </a:xfrm>
           <a:prstGeom prst="rect">
             <a:avLst/>
@@ -3678,81 +3748,11 @@
             <a:r>
               <a:rPr sz="2000" b="0" i="1">
                 <a:solidFill>
-                  <a:srgbClr val="8C8C8C"/>
-                </a:solidFill>
-                <a:latin typeface="Arial"/>
-              </a:rPr>
-              <a:t/>
-            </a:r>
-          </a:p>
-        </p:txBody>
-      </p:sp>
-      <p:sp>
-        <p:nvSpPr>
-          <p:cNvPr id="5" name="TextBox 4"/>
-          <p:cNvSpPr txBox="1"/>
-          <p:nvPr/>
-        </p:nvSpPr>
-        <p:spPr>
-          <a:xfrm>
-            <a:off x="594360" y="3529584"/>
-            <a:ext cx="11002975" cy="685800"/>
-          </a:xfrm>
-          <a:prstGeom prst="rect">
-            <a:avLst/>
-          </a:prstGeom>
-          <a:noFill/>
-        </p:spPr>
-        <p:txBody>
-          <a:bodyPr wrap="square">
-            <a:spAutoFit/>
-          </a:bodyPr>
-          <a:lstStyle/>
-          <a:p>
-            <a:pPr algn="ctr"/>
-            <a:r>
-              <a:rPr sz="4400" b="1" i="0">
-                <a:solidFill>
-                  <a:srgbClr val="FFFFFF"/>
-                </a:solidFill>
-                <a:latin typeface="Arial"/>
-              </a:rPr>
-              <a:t>永遠に変わーらない  神を　愛します</a:t>
-            </a:r>
-          </a:p>
-        </p:txBody>
-      </p:sp>
-      <p:sp>
-        <p:nvSpPr>
-          <p:cNvPr id="6" name="TextBox 5"/>
-          <p:cNvSpPr txBox="1"/>
-          <p:nvPr/>
-        </p:nvSpPr>
-        <p:spPr>
-          <a:xfrm>
-            <a:off x="594360" y="4251960"/>
-            <a:ext cx="11002975" cy="384048"/>
-          </a:xfrm>
-          <a:prstGeom prst="rect">
-            <a:avLst/>
-          </a:prstGeom>
-          <a:noFill/>
-        </p:spPr>
-        <p:txBody>
-          <a:bodyPr wrap="square">
-            <a:spAutoFit/>
-          </a:bodyPr>
-          <a:lstStyle/>
-          <a:p>
-            <a:pPr algn="ctr"/>
-            <a:r>
-              <a:rPr sz="2400" b="0" i="1">
-                <a:solidFill>
-                  <a:srgbClr val="B4B4B4"/>
-                </a:solidFill>
-                <a:latin typeface="Arial"/>
-              </a:rPr>
-              <a:t>eie-n ni kawa--ranai kami wo   ai shimasu</a:t>
+                  <a:srgbClr val="828282"/>
+                </a:solidFill>
+                <a:latin typeface="Arial"/>
+              </a:rPr>
+              <a:t>Eu vou Te amar Senhor, minha força</a:t>
             </a:r>
           </a:p>
         </p:txBody>
@@ -3765,8 +3765,8 @@
         </p:nvSpPr>
         <p:spPr>
           <a:xfrm>
-            <a:off x="594360" y="4672584"/>
-            <a:ext cx="11002975" cy="347472"/>
+            <a:off x="640080" y="4896612"/>
+            <a:ext cx="10911535" cy="310896"/>
           </a:xfrm>
           <a:prstGeom prst="rect">
             <a:avLst/>
@@ -3783,11 +3783,11 @@
             <a:r>
               <a:rPr sz="2000" b="0" i="1">
                 <a:solidFill>
-                  <a:srgbClr val="8C8C8C"/>
-                </a:solidFill>
-                <a:latin typeface="Arial"/>
-              </a:rPr>
-              <a:t/>
+                  <a:srgbClr val="828282"/>
+                </a:solidFill>
+                <a:latin typeface="Arial"/>
+              </a:rPr>
+              <a:t>Eu vou Te amar Senhor, meu escudo</a:t>
             </a:r>
           </a:p>
         </p:txBody>
@@ -3826,23 +3826,23 @@
         </p:nvSpPr>
         <p:spPr>
           <a:xfrm>
-            <a:off x="594360" y="1837944"/>
-            <a:ext cx="11002975" cy="685800"/>
-          </a:xfrm>
-          <a:prstGeom prst="rect">
-            <a:avLst/>
-          </a:prstGeom>
-          <a:noFill/>
-        </p:spPr>
-        <p:txBody>
-          <a:bodyPr wrap="square">
-            <a:spAutoFit/>
-          </a:bodyPr>
-          <a:lstStyle/>
-          <a:p>
-            <a:pPr algn="ctr"/>
-            <a:r>
-              <a:rPr sz="4400" b="1" i="0">
+            <a:off x="640080" y="1650492"/>
+            <a:ext cx="10911535" cy="731520"/>
+          </a:xfrm>
+          <a:prstGeom prst="rect">
+            <a:avLst/>
+          </a:prstGeom>
+          <a:noFill/>
+        </p:spPr>
+        <p:txBody>
+          <a:bodyPr wrap="square">
+            <a:spAutoFit/>
+          </a:bodyPr>
+          <a:lstStyle/>
+          <a:p>
+            <a:pPr algn="ctr"/>
+            <a:r>
+              <a:rPr sz="4800" b="1" i="0">
                 <a:solidFill>
                   <a:srgbClr val="FFFFFF"/>
                 </a:solidFill>
@@ -3861,8 +3861,8 @@
         </p:nvSpPr>
         <p:spPr>
           <a:xfrm>
-            <a:off x="594360" y="2560320"/>
-            <a:ext cx="11002975" cy="384048"/>
+            <a:off x="640080" y="2418588"/>
+            <a:ext cx="10911535" cy="365760"/>
           </a:xfrm>
           <a:prstGeom prst="rect">
             <a:avLst/>
@@ -3879,7 +3879,7 @@
             <a:r>
               <a:rPr sz="2400" b="0" i="1">
                 <a:solidFill>
-                  <a:srgbClr val="B4B4B4"/>
+                  <a:srgbClr val="AAAAAA"/>
                 </a:solidFill>
                 <a:latin typeface="Arial"/>
               </a:rPr>
@@ -3896,8 +3896,78 @@
         </p:nvSpPr>
         <p:spPr>
           <a:xfrm>
-            <a:off x="594360" y="2980944"/>
-            <a:ext cx="11002975" cy="347472"/>
+            <a:off x="640080" y="2985516"/>
+            <a:ext cx="10911535" cy="731520"/>
+          </a:xfrm>
+          <a:prstGeom prst="rect">
+            <a:avLst/>
+          </a:prstGeom>
+          <a:noFill/>
+        </p:spPr>
+        <p:txBody>
+          <a:bodyPr wrap="square">
+            <a:spAutoFit/>
+          </a:bodyPr>
+          <a:lstStyle/>
+          <a:p>
+            <a:pPr algn="ctr"/>
+            <a:r>
+              <a:rPr sz="4800" b="1" i="0">
+                <a:solidFill>
+                  <a:srgbClr val="FFFFFF"/>
+                </a:solidFill>
+                <a:latin typeface="Arial"/>
+              </a:rPr>
+              <a:t>永遠に変わーらない  神を　愛します</a:t>
+            </a:r>
+          </a:p>
+        </p:txBody>
+      </p:sp>
+      <p:sp>
+        <p:nvSpPr>
+          <p:cNvPr id="5" name="TextBox 4"/>
+          <p:cNvSpPr txBox="1"/>
+          <p:nvPr/>
+        </p:nvSpPr>
+        <p:spPr>
+          <a:xfrm>
+            <a:off x="640080" y="3753612"/>
+            <a:ext cx="10911535" cy="365760"/>
+          </a:xfrm>
+          <a:prstGeom prst="rect">
+            <a:avLst/>
+          </a:prstGeom>
+          <a:noFill/>
+        </p:spPr>
+        <p:txBody>
+          <a:bodyPr wrap="square">
+            <a:spAutoFit/>
+          </a:bodyPr>
+          <a:lstStyle/>
+          <a:p>
+            <a:pPr algn="ctr"/>
+            <a:r>
+              <a:rPr sz="2400" b="0" i="1">
+                <a:solidFill>
+                  <a:srgbClr val="AAAAAA"/>
+                </a:solidFill>
+                <a:latin typeface="Arial"/>
+              </a:rPr>
+              <a:t>eie-n ni kawa--ranai kami wo   ai shimasu</a:t>
+            </a:r>
+          </a:p>
+        </p:txBody>
+      </p:sp>
+      <p:sp>
+        <p:nvSpPr>
+          <p:cNvPr id="6" name="TextBox 5"/>
+          <p:cNvSpPr txBox="1"/>
+          <p:nvPr/>
+        </p:nvSpPr>
+        <p:spPr>
+          <a:xfrm>
+            <a:off x="640080" y="4530852"/>
+            <a:ext cx="10911535" cy="310896"/>
           </a:xfrm>
           <a:prstGeom prst="rect">
             <a:avLst/>
@@ -3914,81 +3984,11 @@
             <a:r>
               <a:rPr sz="2000" b="0" i="1">
                 <a:solidFill>
-                  <a:srgbClr val="8C8C8C"/>
-                </a:solidFill>
-                <a:latin typeface="Arial"/>
-              </a:rPr>
-              <a:t/>
-            </a:r>
-          </a:p>
-        </p:txBody>
-      </p:sp>
-      <p:sp>
-        <p:nvSpPr>
-          <p:cNvPr id="5" name="TextBox 4"/>
-          <p:cNvSpPr txBox="1"/>
-          <p:nvPr/>
-        </p:nvSpPr>
-        <p:spPr>
-          <a:xfrm>
-            <a:off x="594360" y="3529584"/>
-            <a:ext cx="11002975" cy="685800"/>
-          </a:xfrm>
-          <a:prstGeom prst="rect">
-            <a:avLst/>
-          </a:prstGeom>
-          <a:noFill/>
-        </p:spPr>
-        <p:txBody>
-          <a:bodyPr wrap="square">
-            <a:spAutoFit/>
-          </a:bodyPr>
-          <a:lstStyle/>
-          <a:p>
-            <a:pPr algn="ctr"/>
-            <a:r>
-              <a:rPr sz="4400" b="1" i="0">
-                <a:solidFill>
-                  <a:srgbClr val="FFFFFF"/>
-                </a:solidFill>
-                <a:latin typeface="Arial"/>
-              </a:rPr>
-              <a:t>永遠に変わーらない  神を　愛します</a:t>
-            </a:r>
-          </a:p>
-        </p:txBody>
-      </p:sp>
-      <p:sp>
-        <p:nvSpPr>
-          <p:cNvPr id="6" name="TextBox 5"/>
-          <p:cNvSpPr txBox="1"/>
-          <p:nvPr/>
-        </p:nvSpPr>
-        <p:spPr>
-          <a:xfrm>
-            <a:off x="594360" y="4251960"/>
-            <a:ext cx="11002975" cy="384048"/>
-          </a:xfrm>
-          <a:prstGeom prst="rect">
-            <a:avLst/>
-          </a:prstGeom>
-          <a:noFill/>
-        </p:spPr>
-        <p:txBody>
-          <a:bodyPr wrap="square">
-            <a:spAutoFit/>
-          </a:bodyPr>
-          <a:lstStyle/>
-          <a:p>
-            <a:pPr algn="ctr"/>
-            <a:r>
-              <a:rPr sz="2400" b="0" i="1">
-                <a:solidFill>
-                  <a:srgbClr val="B4B4B4"/>
-                </a:solidFill>
-                <a:latin typeface="Arial"/>
-              </a:rPr>
-              <a:t>eie-n ni kawa--ranai kami wo   ai shimasu</a:t>
+                  <a:srgbClr val="828282"/>
+                </a:solidFill>
+                <a:latin typeface="Arial"/>
+              </a:rPr>
+              <a:t>Eu vou Te amar Senhor, minha força</a:t>
             </a:r>
           </a:p>
         </p:txBody>
@@ -4001,8 +4001,8 @@
         </p:nvSpPr>
         <p:spPr>
           <a:xfrm>
-            <a:off x="594360" y="4672584"/>
-            <a:ext cx="11002975" cy="347472"/>
+            <a:off x="640080" y="4896612"/>
+            <a:ext cx="10911535" cy="310896"/>
           </a:xfrm>
           <a:prstGeom prst="rect">
             <a:avLst/>
@@ -4019,11 +4019,11 @@
             <a:r>
               <a:rPr sz="2000" b="0" i="1">
                 <a:solidFill>
-                  <a:srgbClr val="8C8C8C"/>
-                </a:solidFill>
-                <a:latin typeface="Arial"/>
-              </a:rPr>
-              <a:t/>
+                  <a:srgbClr val="828282"/>
+                </a:solidFill>
+                <a:latin typeface="Arial"/>
+              </a:rPr>
+              <a:t>Eu vou Te amar Senhor, meu escudo</a:t>
             </a:r>
           </a:p>
         </p:txBody>
@@ -4062,23 +4062,23 @@
         </p:nvSpPr>
         <p:spPr>
           <a:xfrm>
-            <a:off x="594360" y="1837944"/>
-            <a:ext cx="11002975" cy="685800"/>
-          </a:xfrm>
-          <a:prstGeom prst="rect">
-            <a:avLst/>
-          </a:prstGeom>
-          <a:noFill/>
-        </p:spPr>
-        <p:txBody>
-          <a:bodyPr wrap="square">
-            <a:spAutoFit/>
-          </a:bodyPr>
-          <a:lstStyle/>
-          <a:p>
-            <a:pPr algn="ctr"/>
-            <a:r>
-              <a:rPr sz="4400" b="1" i="0">
+            <a:off x="640080" y="1650492"/>
+            <a:ext cx="10911535" cy="731520"/>
+          </a:xfrm>
+          <a:prstGeom prst="rect">
+            <a:avLst/>
+          </a:prstGeom>
+          <a:noFill/>
+        </p:spPr>
+        <p:txBody>
+          <a:bodyPr wrap="square">
+            <a:spAutoFit/>
+          </a:bodyPr>
+          <a:lstStyle/>
+          <a:p>
+            <a:pPr algn="ctr"/>
+            <a:r>
+              <a:rPr sz="4800" b="1" i="0">
                 <a:solidFill>
                   <a:srgbClr val="FFFFFF"/>
                 </a:solidFill>
@@ -4097,8 +4097,8 @@
         </p:nvSpPr>
         <p:spPr>
           <a:xfrm>
-            <a:off x="594360" y="2560320"/>
-            <a:ext cx="11002975" cy="384048"/>
+            <a:off x="640080" y="2418588"/>
+            <a:ext cx="10911535" cy="365760"/>
           </a:xfrm>
           <a:prstGeom prst="rect">
             <a:avLst/>
@@ -4115,7 +4115,7 @@
             <a:r>
               <a:rPr sz="2400" b="0" i="1">
                 <a:solidFill>
-                  <a:srgbClr val="B4B4B4"/>
+                  <a:srgbClr val="AAAAAA"/>
                 </a:solidFill>
                 <a:latin typeface="Arial"/>
               </a:rPr>
@@ -4132,8 +4132,78 @@
         </p:nvSpPr>
         <p:spPr>
           <a:xfrm>
-            <a:off x="594360" y="2980944"/>
-            <a:ext cx="11002975" cy="347472"/>
+            <a:off x="640080" y="2985516"/>
+            <a:ext cx="10911535" cy="731520"/>
+          </a:xfrm>
+          <a:prstGeom prst="rect">
+            <a:avLst/>
+          </a:prstGeom>
+          <a:noFill/>
+        </p:spPr>
+        <p:txBody>
+          <a:bodyPr wrap="square">
+            <a:spAutoFit/>
+          </a:bodyPr>
+          <a:lstStyle/>
+          <a:p>
+            <a:pPr algn="ctr"/>
+            <a:r>
+              <a:rPr sz="4800" b="1" i="0">
+                <a:solidFill>
+                  <a:srgbClr val="FFFFFF"/>
+                </a:solidFill>
+                <a:latin typeface="Arial"/>
+              </a:rPr>
+              <a:t>命の限り        治める主よ  ハレルヤ</a:t>
+            </a:r>
+          </a:p>
+        </p:txBody>
+      </p:sp>
+      <p:sp>
+        <p:nvSpPr>
+          <p:cNvPr id="5" name="TextBox 4"/>
+          <p:cNvSpPr txBox="1"/>
+          <p:nvPr/>
+        </p:nvSpPr>
+        <p:spPr>
+          <a:xfrm>
+            <a:off x="640080" y="3753612"/>
+            <a:ext cx="10911535" cy="365760"/>
+          </a:xfrm>
+          <a:prstGeom prst="rect">
+            <a:avLst/>
+          </a:prstGeom>
+          <a:noFill/>
+        </p:spPr>
+        <p:txBody>
+          <a:bodyPr wrap="square">
+            <a:spAutoFit/>
+          </a:bodyPr>
+          <a:lstStyle/>
+          <a:p>
+            <a:pPr algn="ctr"/>
+            <a:r>
+              <a:rPr sz="2400" b="0" i="1">
+                <a:solidFill>
+                  <a:srgbClr val="AAAAAA"/>
+                </a:solidFill>
+                <a:latin typeface="Arial"/>
+              </a:rPr>
+              <a:t>inochi no kagiri   osameru shu yo  hareruya</a:t>
+            </a:r>
+          </a:p>
+        </p:txBody>
+      </p:sp>
+      <p:sp>
+        <p:nvSpPr>
+          <p:cNvPr id="6" name="TextBox 5"/>
+          <p:cNvSpPr txBox="1"/>
+          <p:nvPr/>
+        </p:nvSpPr>
+        <p:spPr>
+          <a:xfrm>
+            <a:off x="640080" y="4530852"/>
+            <a:ext cx="10911535" cy="310896"/>
           </a:xfrm>
           <a:prstGeom prst="rect">
             <a:avLst/>
@@ -4150,81 +4220,11 @@
             <a:r>
               <a:rPr sz="2000" b="0" i="1">
                 <a:solidFill>
-                  <a:srgbClr val="8C8C8C"/>
-                </a:solidFill>
-                <a:latin typeface="Arial"/>
-              </a:rPr>
-              <a:t/>
-            </a:r>
-          </a:p>
-        </p:txBody>
-      </p:sp>
-      <p:sp>
-        <p:nvSpPr>
-          <p:cNvPr id="5" name="TextBox 4"/>
-          <p:cNvSpPr txBox="1"/>
-          <p:nvPr/>
-        </p:nvSpPr>
-        <p:spPr>
-          <a:xfrm>
-            <a:off x="594360" y="3529584"/>
-            <a:ext cx="11002975" cy="685800"/>
-          </a:xfrm>
-          <a:prstGeom prst="rect">
-            <a:avLst/>
-          </a:prstGeom>
-          <a:noFill/>
-        </p:spPr>
-        <p:txBody>
-          <a:bodyPr wrap="square">
-            <a:spAutoFit/>
-          </a:bodyPr>
-          <a:lstStyle/>
-          <a:p>
-            <a:pPr algn="ctr"/>
-            <a:r>
-              <a:rPr sz="4400" b="1" i="0">
-                <a:solidFill>
-                  <a:srgbClr val="FFFFFF"/>
-                </a:solidFill>
-                <a:latin typeface="Arial"/>
-              </a:rPr>
-              <a:t>命の限り        治める主よ  ハレルヤ</a:t>
-            </a:r>
-          </a:p>
-        </p:txBody>
-      </p:sp>
-      <p:sp>
-        <p:nvSpPr>
-          <p:cNvPr id="6" name="TextBox 5"/>
-          <p:cNvSpPr txBox="1"/>
-          <p:nvPr/>
-        </p:nvSpPr>
-        <p:spPr>
-          <a:xfrm>
-            <a:off x="594360" y="4251960"/>
-            <a:ext cx="11002975" cy="384048"/>
-          </a:xfrm>
-          <a:prstGeom prst="rect">
-            <a:avLst/>
-          </a:prstGeom>
-          <a:noFill/>
-        </p:spPr>
-        <p:txBody>
-          <a:bodyPr wrap="square">
-            <a:spAutoFit/>
-          </a:bodyPr>
-          <a:lstStyle/>
-          <a:p>
-            <a:pPr algn="ctr"/>
-            <a:r>
-              <a:rPr sz="2344" b="0" i="1">
-                <a:solidFill>
-                  <a:srgbClr val="B4B4B4"/>
-                </a:solidFill>
-                <a:latin typeface="Arial"/>
-              </a:rPr>
-              <a:t>inochi no kagiri   osameru shu yo  hareruya</a:t>
+                  <a:srgbClr val="828282"/>
+                </a:solidFill>
+                <a:latin typeface="Arial"/>
+              </a:rPr>
+              <a:t>Aleluia, nosso Deus reina para sempre</a:t>
             </a:r>
           </a:p>
         </p:txBody>
@@ -4237,8 +4237,8 @@
         </p:nvSpPr>
         <p:spPr>
           <a:xfrm>
-            <a:off x="594360" y="4672584"/>
-            <a:ext cx="11002975" cy="347472"/>
+            <a:off x="640080" y="4896612"/>
+            <a:ext cx="10911535" cy="310896"/>
           </a:xfrm>
           <a:prstGeom prst="rect">
             <a:avLst/>
@@ -4255,11 +4255,11 @@
             <a:r>
               <a:rPr sz="2000" b="0" i="1">
                 <a:solidFill>
-                  <a:srgbClr val="8C8C8C"/>
-                </a:solidFill>
-                <a:latin typeface="Arial"/>
-              </a:rPr>
-              <a:t/>
+                  <a:srgbClr val="828282"/>
+                </a:solidFill>
+                <a:latin typeface="Arial"/>
+              </a:rPr>
+              <a:t>Todos os meus dias</a:t>
             </a:r>
           </a:p>
         </p:txBody>
@@ -4298,23 +4298,23 @@
         </p:nvSpPr>
         <p:spPr>
           <a:xfrm>
-            <a:off x="594360" y="2258568"/>
-            <a:ext cx="11002975" cy="685800"/>
-          </a:xfrm>
-          <a:prstGeom prst="rect">
-            <a:avLst/>
-          </a:prstGeom>
-          <a:noFill/>
-        </p:spPr>
-        <p:txBody>
-          <a:bodyPr wrap="square">
-            <a:spAutoFit/>
-          </a:bodyPr>
-          <a:lstStyle/>
-          <a:p>
-            <a:pPr algn="ctr"/>
-            <a:r>
-              <a:rPr sz="3805" b="1" i="0">
+            <a:off x="640080" y="2052828"/>
+            <a:ext cx="10911535" cy="731520"/>
+          </a:xfrm>
+          <a:prstGeom prst="rect">
+            <a:avLst/>
+          </a:prstGeom>
+          <a:noFill/>
+        </p:spPr>
+        <p:txBody>
+          <a:bodyPr wrap="square">
+            <a:spAutoFit/>
+          </a:bodyPr>
+          <a:lstStyle/>
+          <a:p>
+            <a:pPr algn="ctr"/>
+            <a:r>
+              <a:rPr sz="4100" b="1" i="0">
                 <a:solidFill>
                   <a:srgbClr val="FFFFFF"/>
                 </a:solidFill>
@@ -4333,29 +4333,29 @@
         </p:nvSpPr>
         <p:spPr>
           <a:xfrm>
-            <a:off x="594360" y="2980944"/>
-            <a:ext cx="11002975" cy="347472"/>
-          </a:xfrm>
-          <a:prstGeom prst="rect">
-            <a:avLst/>
-          </a:prstGeom>
-          <a:noFill/>
-        </p:spPr>
-        <p:txBody>
-          <a:bodyPr wrap="square">
-            <a:spAutoFit/>
-          </a:bodyPr>
-          <a:lstStyle/>
-          <a:p>
-            <a:pPr algn="ctr"/>
-            <a:r>
-              <a:rPr sz="2200" b="0" i="1">
-                <a:solidFill>
-                  <a:srgbClr val="8C8C8C"/>
-                </a:solidFill>
-                <a:latin typeface="Arial"/>
-              </a:rPr>
-              <a:t/>
+            <a:off x="640080" y="2985516"/>
+            <a:ext cx="10911535" cy="731520"/>
+          </a:xfrm>
+          <a:prstGeom prst="rect">
+            <a:avLst/>
+          </a:prstGeom>
+          <a:noFill/>
+        </p:spPr>
+        <p:txBody>
+          <a:bodyPr wrap="square">
+            <a:spAutoFit/>
+          </a:bodyPr>
+          <a:lstStyle/>
+          <a:p>
+            <a:pPr algn="ctr"/>
+            <a:r>
+              <a:rPr sz="4800" b="1" i="0">
+                <a:solidFill>
+                  <a:srgbClr val="FFFFFF"/>
+                </a:solidFill>
+                <a:latin typeface="Arial"/>
+              </a:rPr>
+              <a:t>Todos os meus dias</a:t>
             </a:r>
           </a:p>
         </p:txBody>
@@ -4368,29 +4368,29 @@
         </p:nvSpPr>
         <p:spPr>
           <a:xfrm>
-            <a:off x="594360" y="3529584"/>
-            <a:ext cx="11002975" cy="685800"/>
-          </a:xfrm>
-          <a:prstGeom prst="rect">
-            <a:avLst/>
-          </a:prstGeom>
-          <a:noFill/>
-        </p:spPr>
-        <p:txBody>
-          <a:bodyPr wrap="square">
-            <a:spAutoFit/>
-          </a:bodyPr>
-          <a:lstStyle/>
-          <a:p>
-            <a:pPr algn="ctr"/>
-            <a:r>
-              <a:rPr sz="4400" b="1" i="0">
-                <a:solidFill>
-                  <a:srgbClr val="FFFFFF"/>
-                </a:solidFill>
-                <a:latin typeface="Arial"/>
-              </a:rPr>
-              <a:t>Todos os meus dias</a:t>
+            <a:off x="640080" y="4128516"/>
+            <a:ext cx="10911535" cy="310896"/>
+          </a:xfrm>
+          <a:prstGeom prst="rect">
+            <a:avLst/>
+          </a:prstGeom>
+          <a:noFill/>
+        </p:spPr>
+        <p:txBody>
+          <a:bodyPr wrap="square">
+            <a:spAutoFit/>
+          </a:bodyPr>
+          <a:lstStyle/>
+          <a:p>
+            <a:pPr algn="ctr"/>
+            <a:r>
+              <a:rPr sz="2000" b="0" i="0">
+                <a:solidFill>
+                  <a:srgbClr val="828282"/>
+                </a:solidFill>
+                <a:latin typeface="Arial"/>
+              </a:rPr>
+              <a:t>世界を治め       私の日々を</a:t>
             </a:r>
           </a:p>
         </p:txBody>
@@ -4403,29 +4403,29 @@
         </p:nvSpPr>
         <p:spPr>
           <a:xfrm>
-            <a:off x="594360" y="4251960"/>
-            <a:ext cx="11002975" cy="347472"/>
-          </a:xfrm>
-          <a:prstGeom prst="rect">
-            <a:avLst/>
-          </a:prstGeom>
-          <a:noFill/>
-        </p:spPr>
-        <p:txBody>
-          <a:bodyPr wrap="square">
-            <a:spAutoFit/>
-          </a:bodyPr>
-          <a:lstStyle/>
-          <a:p>
-            <a:pPr algn="ctr"/>
-            <a:r>
-              <a:rPr sz="2200" b="0" i="1">
-                <a:solidFill>
-                  <a:srgbClr val="8C8C8C"/>
-                </a:solidFill>
-                <a:latin typeface="Arial"/>
-              </a:rPr>
-              <a:t/>
+            <a:off x="640080" y="4494276"/>
+            <a:ext cx="10911535" cy="310896"/>
+          </a:xfrm>
+          <a:prstGeom prst="rect">
+            <a:avLst/>
+          </a:prstGeom>
+          <a:noFill/>
+        </p:spPr>
+        <p:txBody>
+          <a:bodyPr wrap="square">
+            <a:spAutoFit/>
+          </a:bodyPr>
+          <a:lstStyle/>
+          <a:p>
+            <a:pPr algn="ctr"/>
+            <a:r>
+              <a:rPr sz="2000" b="0" i="0">
+                <a:solidFill>
+                  <a:srgbClr val="828282"/>
+                </a:solidFill>
+                <a:latin typeface="Arial"/>
+              </a:rPr>
+              <a:t>命の限り        治める主よ  ハレルヤ</a:t>
             </a:r>
           </a:p>
         </p:txBody>
@@ -4464,23 +4464,23 @@
         </p:nvSpPr>
         <p:spPr>
           <a:xfrm>
-            <a:off x="594360" y="2258568"/>
-            <a:ext cx="11002975" cy="685800"/>
-          </a:xfrm>
-          <a:prstGeom prst="rect">
-            <a:avLst/>
-          </a:prstGeom>
-          <a:noFill/>
-        </p:spPr>
-        <p:txBody>
-          <a:bodyPr wrap="square">
-            <a:spAutoFit/>
-          </a:bodyPr>
-          <a:lstStyle/>
-          <a:p>
-            <a:pPr algn="ctr"/>
-            <a:r>
-              <a:rPr sz="4400" b="1" i="0">
+            <a:off x="640080" y="2052828"/>
+            <a:ext cx="10911535" cy="731520"/>
+          </a:xfrm>
+          <a:prstGeom prst="rect">
+            <a:avLst/>
+          </a:prstGeom>
+          <a:noFill/>
+        </p:spPr>
+        <p:txBody>
+          <a:bodyPr wrap="square">
+            <a:spAutoFit/>
+          </a:bodyPr>
+          <a:lstStyle/>
+          <a:p>
+            <a:pPr algn="ctr"/>
+            <a:r>
+              <a:rPr sz="4800" b="1" i="0">
                 <a:solidFill>
                   <a:srgbClr val="FFFFFF"/>
                 </a:solidFill>
@@ -4499,99 +4499,29 @@
         </p:nvSpPr>
         <p:spPr>
           <a:xfrm>
-            <a:off x="594360" y="2980944"/>
-            <a:ext cx="11002975" cy="347472"/>
-          </a:xfrm>
-          <a:prstGeom prst="rect">
-            <a:avLst/>
-          </a:prstGeom>
-          <a:noFill/>
-        </p:spPr>
-        <p:txBody>
-          <a:bodyPr wrap="square">
-            <a:spAutoFit/>
-          </a:bodyPr>
-          <a:lstStyle/>
-          <a:p>
-            <a:pPr algn="ctr"/>
-            <a:r>
-              <a:rPr sz="2200" b="0" i="1">
-                <a:solidFill>
-                  <a:srgbClr val="8C8C8C"/>
-                </a:solidFill>
-                <a:latin typeface="Arial"/>
-              </a:rPr>
-              <a:t/>
-            </a:r>
-          </a:p>
-        </p:txBody>
-      </p:sp>
-      <p:sp>
-        <p:nvSpPr>
-          <p:cNvPr id="4" name="TextBox 3"/>
-          <p:cNvSpPr txBox="1"/>
-          <p:nvPr/>
-        </p:nvSpPr>
-        <p:spPr>
-          <a:xfrm>
-            <a:off x="594360" y="3529584"/>
-            <a:ext cx="11002975" cy="685800"/>
-          </a:xfrm>
-          <a:prstGeom prst="rect">
-            <a:avLst/>
-          </a:prstGeom>
-          <a:noFill/>
-        </p:spPr>
-        <p:txBody>
-          <a:bodyPr wrap="square">
-            <a:spAutoFit/>
-          </a:bodyPr>
-          <a:lstStyle/>
-          <a:p>
-            <a:pPr algn="ctr"/>
-            <a:r>
-              <a:rPr sz="3805" b="1" i="0">
+            <a:off x="640080" y="2985516"/>
+            <a:ext cx="10911535" cy="731520"/>
+          </a:xfrm>
+          <a:prstGeom prst="rect">
+            <a:avLst/>
+          </a:prstGeom>
+          <a:noFill/>
+        </p:spPr>
+        <p:txBody>
+          <a:bodyPr wrap="square">
+            <a:spAutoFit/>
+          </a:bodyPr>
+          <a:lstStyle/>
+          <a:p>
+            <a:pPr algn="ctr"/>
+            <a:r>
+              <a:rPr sz="4100" b="1" i="0">
                 <a:solidFill>
                   <a:srgbClr val="FFFFFF"/>
                 </a:solidFill>
                 <a:latin typeface="Arial"/>
               </a:rPr>
               <a:t>Aleluia, nosso Deus reina para sempre</a:t>
-            </a:r>
-          </a:p>
-        </p:txBody>
-      </p:sp>
-      <p:sp>
-        <p:nvSpPr>
-          <p:cNvPr id="5" name="TextBox 4"/>
-          <p:cNvSpPr txBox="1"/>
-          <p:nvPr/>
-        </p:nvSpPr>
-        <p:spPr>
-          <a:xfrm>
-            <a:off x="594360" y="4251960"/>
-            <a:ext cx="11002975" cy="347472"/>
-          </a:xfrm>
-          <a:prstGeom prst="rect">
-            <a:avLst/>
-          </a:prstGeom>
-          <a:noFill/>
-        </p:spPr>
-        <p:txBody>
-          <a:bodyPr wrap="square">
-            <a:spAutoFit/>
-          </a:bodyPr>
-          <a:lstStyle/>
-          <a:p>
-            <a:pPr algn="ctr"/>
-            <a:r>
-              <a:rPr sz="2200" b="0" i="1">
-                <a:solidFill>
-                  <a:srgbClr val="8C8C8C"/>
-                </a:solidFill>
-                <a:latin typeface="Arial"/>
-              </a:rPr>
-              <a:t/>
             </a:r>
           </a:p>
         </p:txBody>
@@ -4630,23 +4560,23 @@
         </p:nvSpPr>
         <p:spPr>
           <a:xfrm>
-            <a:off x="594360" y="1837944"/>
-            <a:ext cx="11002975" cy="685800"/>
-          </a:xfrm>
-          <a:prstGeom prst="rect">
-            <a:avLst/>
-          </a:prstGeom>
-          <a:noFill/>
-        </p:spPr>
-        <p:txBody>
-          <a:bodyPr wrap="square">
-            <a:spAutoFit/>
-          </a:bodyPr>
-          <a:lstStyle/>
-          <a:p>
-            <a:pPr algn="ctr"/>
-            <a:r>
-              <a:rPr sz="4400" b="1" i="0">
+            <a:off x="640080" y="1650492"/>
+            <a:ext cx="10911535" cy="731520"/>
+          </a:xfrm>
+          <a:prstGeom prst="rect">
+            <a:avLst/>
+          </a:prstGeom>
+          <a:noFill/>
+        </p:spPr>
+        <p:txBody>
+          <a:bodyPr wrap="square">
+            <a:spAutoFit/>
+          </a:bodyPr>
+          <a:lstStyle/>
+          <a:p>
+            <a:pPr algn="ctr"/>
+            <a:r>
+              <a:rPr sz="4800" b="1" i="0">
                 <a:solidFill>
                   <a:srgbClr val="FFFFFF"/>
                 </a:solidFill>
@@ -4665,8 +4595,8 @@
         </p:nvSpPr>
         <p:spPr>
           <a:xfrm>
-            <a:off x="594360" y="2560320"/>
-            <a:ext cx="11002975" cy="384048"/>
+            <a:off x="640080" y="2418588"/>
+            <a:ext cx="10911535" cy="365760"/>
           </a:xfrm>
           <a:prstGeom prst="rect">
             <a:avLst/>
@@ -4683,7 +4613,7 @@
             <a:r>
               <a:rPr sz="2400" b="0" i="1">
                 <a:solidFill>
-                  <a:srgbClr val="B4B4B4"/>
+                  <a:srgbClr val="AAAAAA"/>
                 </a:solidFill>
                 <a:latin typeface="Arial"/>
               </a:rPr>
@@ -4700,8 +4630,78 @@
         </p:nvSpPr>
         <p:spPr>
           <a:xfrm>
-            <a:off x="594360" y="2980944"/>
-            <a:ext cx="11002975" cy="347472"/>
+            <a:off x="640080" y="2985516"/>
+            <a:ext cx="10911535" cy="731520"/>
+          </a:xfrm>
+          <a:prstGeom prst="rect">
+            <a:avLst/>
+          </a:prstGeom>
+          <a:noFill/>
+        </p:spPr>
+        <p:txBody>
+          <a:bodyPr wrap="square">
+            <a:spAutoFit/>
+          </a:bodyPr>
+          <a:lstStyle/>
+          <a:p>
+            <a:pPr algn="ctr"/>
+            <a:r>
+              <a:rPr sz="4800" b="1" i="0">
+                <a:solidFill>
+                  <a:srgbClr val="FFFFFF"/>
+                </a:solidFill>
+                <a:latin typeface="Arial"/>
+              </a:rPr>
+              <a:t>この目で        見えるように</a:t>
+            </a:r>
+          </a:p>
+        </p:txBody>
+      </p:sp>
+      <p:sp>
+        <p:nvSpPr>
+          <p:cNvPr id="5" name="TextBox 4"/>
+          <p:cNvSpPr txBox="1"/>
+          <p:nvPr/>
+        </p:nvSpPr>
+        <p:spPr>
+          <a:xfrm>
+            <a:off x="640080" y="3753612"/>
+            <a:ext cx="10911535" cy="365760"/>
+          </a:xfrm>
+          <a:prstGeom prst="rect">
+            <a:avLst/>
+          </a:prstGeom>
+          <a:noFill/>
+        </p:spPr>
+        <p:txBody>
+          <a:bodyPr wrap="square">
+            <a:spAutoFit/>
+          </a:bodyPr>
+          <a:lstStyle/>
+          <a:p>
+            <a:pPr algn="ctr"/>
+            <a:r>
+              <a:rPr sz="2400" b="0" i="1">
+                <a:solidFill>
+                  <a:srgbClr val="AAAAAA"/>
+                </a:solidFill>
+                <a:latin typeface="Arial"/>
+              </a:rPr>
+              <a:t>kono me de     mieru you ni</a:t>
+            </a:r>
+          </a:p>
+        </p:txBody>
+      </p:sp>
+      <p:sp>
+        <p:nvSpPr>
+          <p:cNvPr id="6" name="TextBox 5"/>
+          <p:cNvSpPr txBox="1"/>
+          <p:nvPr/>
+        </p:nvSpPr>
+        <p:spPr>
+          <a:xfrm>
+            <a:off x="640080" y="4530852"/>
+            <a:ext cx="10911535" cy="310896"/>
           </a:xfrm>
           <a:prstGeom prst="rect">
             <a:avLst/>
@@ -4718,81 +4718,11 @@
             <a:r>
               <a:rPr sz="2000" b="0" i="1">
                 <a:solidFill>
-                  <a:srgbClr val="8C8C8C"/>
-                </a:solidFill>
-                <a:latin typeface="Arial"/>
-              </a:rPr>
-              <a:t/>
-            </a:r>
-          </a:p>
-        </p:txBody>
-      </p:sp>
-      <p:sp>
-        <p:nvSpPr>
-          <p:cNvPr id="5" name="TextBox 4"/>
-          <p:cNvSpPr txBox="1"/>
-          <p:nvPr/>
-        </p:nvSpPr>
-        <p:spPr>
-          <a:xfrm>
-            <a:off x="594360" y="3529584"/>
-            <a:ext cx="11002975" cy="685800"/>
-          </a:xfrm>
-          <a:prstGeom prst="rect">
-            <a:avLst/>
-          </a:prstGeom>
-          <a:noFill/>
-        </p:spPr>
-        <p:txBody>
-          <a:bodyPr wrap="square">
-            <a:spAutoFit/>
-          </a:bodyPr>
-          <a:lstStyle/>
-          <a:p>
-            <a:pPr algn="ctr"/>
-            <a:r>
-              <a:rPr sz="4400" b="1" i="0">
-                <a:solidFill>
-                  <a:srgbClr val="FFFFFF"/>
-                </a:solidFill>
-                <a:latin typeface="Arial"/>
-              </a:rPr>
-              <a:t>この目で        見えるように</a:t>
-            </a:r>
-          </a:p>
-        </p:txBody>
-      </p:sp>
-      <p:sp>
-        <p:nvSpPr>
-          <p:cNvPr id="6" name="TextBox 5"/>
-          <p:cNvSpPr txBox="1"/>
-          <p:nvPr/>
-        </p:nvSpPr>
-        <p:spPr>
-          <a:xfrm>
-            <a:off x="594360" y="4251960"/>
-            <a:ext cx="11002975" cy="384048"/>
-          </a:xfrm>
-          <a:prstGeom prst="rect">
-            <a:avLst/>
-          </a:prstGeom>
-          <a:noFill/>
-        </p:spPr>
-        <p:txBody>
-          <a:bodyPr wrap="square">
-            <a:spAutoFit/>
-          </a:bodyPr>
-          <a:lstStyle/>
-          <a:p>
-            <a:pPr algn="ctr"/>
-            <a:r>
-              <a:rPr sz="2400" b="0" i="1">
-                <a:solidFill>
-                  <a:srgbClr val="B4B4B4"/>
-                </a:solidFill>
-                <a:latin typeface="Arial"/>
-              </a:rPr>
-              <a:t>kono me de     mieru you ni</a:t>
+                  <a:srgbClr val="828282"/>
+                </a:solidFill>
+                <a:latin typeface="Arial"/>
+              </a:rPr>
+              <a:t>Dá-me visão para ver as coisas como Tu vês</a:t>
             </a:r>
           </a:p>
         </p:txBody>
@@ -4805,8 +4735,8 @@
         </p:nvSpPr>
         <p:spPr>
           <a:xfrm>
-            <a:off x="594360" y="4672584"/>
-            <a:ext cx="11002975" cy="347472"/>
+            <a:off x="640080" y="4896612"/>
+            <a:ext cx="10911535" cy="310896"/>
           </a:xfrm>
           <a:prstGeom prst="rect">
             <a:avLst/>
@@ -4823,11 +4753,11 @@
             <a:r>
               <a:rPr sz="2000" b="0" i="1">
                 <a:solidFill>
-                  <a:srgbClr val="8C8C8C"/>
-                </a:solidFill>
-                <a:latin typeface="Arial"/>
-              </a:rPr>
-              <a:t/>
+                  <a:srgbClr val="828282"/>
+                </a:solidFill>
+                <a:latin typeface="Arial"/>
+              </a:rPr>
+              <a:t>Deus, eu olho para Ti</a:t>
             </a:r>
           </a:p>
         </p:txBody>
@@ -4866,23 +4796,23 @@
         </p:nvSpPr>
         <p:spPr>
           <a:xfrm>
-            <a:off x="594360" y="2258568"/>
-            <a:ext cx="11002975" cy="685800"/>
-          </a:xfrm>
-          <a:prstGeom prst="rect">
-            <a:avLst/>
-          </a:prstGeom>
-          <a:noFill/>
-        </p:spPr>
-        <p:txBody>
-          <a:bodyPr wrap="square">
-            <a:spAutoFit/>
-          </a:bodyPr>
-          <a:lstStyle/>
-          <a:p>
-            <a:pPr algn="ctr"/>
-            <a:r>
-              <a:rPr sz="4400" b="1" i="0">
+            <a:off x="640080" y="2052828"/>
+            <a:ext cx="10911535" cy="731520"/>
+          </a:xfrm>
+          <a:prstGeom prst="rect">
+            <a:avLst/>
+          </a:prstGeom>
+          <a:noFill/>
+        </p:spPr>
+        <p:txBody>
+          <a:bodyPr wrap="square">
+            <a:spAutoFit/>
+          </a:bodyPr>
+          <a:lstStyle/>
+          <a:p>
+            <a:pPr algn="ctr"/>
+            <a:r>
+              <a:rPr sz="4800" b="1" i="0">
                 <a:solidFill>
                   <a:srgbClr val="FFFFFF"/>
                 </a:solidFill>
@@ -4901,99 +4831,29 @@
         </p:nvSpPr>
         <p:spPr>
           <a:xfrm>
-            <a:off x="594360" y="2980944"/>
-            <a:ext cx="11002975" cy="347472"/>
-          </a:xfrm>
-          <a:prstGeom prst="rect">
-            <a:avLst/>
-          </a:prstGeom>
-          <a:noFill/>
-        </p:spPr>
-        <p:txBody>
-          <a:bodyPr wrap="square">
-            <a:spAutoFit/>
-          </a:bodyPr>
-          <a:lstStyle/>
-          <a:p>
-            <a:pPr algn="ctr"/>
-            <a:r>
-              <a:rPr sz="2200" b="0" i="1">
-                <a:solidFill>
-                  <a:srgbClr val="8C8C8C"/>
-                </a:solidFill>
-                <a:latin typeface="Arial"/>
-              </a:rPr>
-              <a:t/>
-            </a:r>
-          </a:p>
-        </p:txBody>
-      </p:sp>
-      <p:sp>
-        <p:nvSpPr>
-          <p:cNvPr id="4" name="TextBox 3"/>
-          <p:cNvSpPr txBox="1"/>
-          <p:nvPr/>
-        </p:nvSpPr>
-        <p:spPr>
-          <a:xfrm>
-            <a:off x="594360" y="3529584"/>
-            <a:ext cx="11002975" cy="685800"/>
-          </a:xfrm>
-          <a:prstGeom prst="rect">
-            <a:avLst/>
-          </a:prstGeom>
-          <a:noFill/>
-        </p:spPr>
-        <p:txBody>
-          <a:bodyPr wrap="square">
-            <a:spAutoFit/>
-          </a:bodyPr>
-          <a:lstStyle/>
-          <a:p>
-            <a:pPr algn="ctr"/>
-            <a:r>
-              <a:rPr sz="3128" b="1" i="0">
+            <a:off x="640080" y="2985516"/>
+            <a:ext cx="10911535" cy="731520"/>
+          </a:xfrm>
+          <a:prstGeom prst="rect">
+            <a:avLst/>
+          </a:prstGeom>
+          <a:noFill/>
+        </p:spPr>
+        <p:txBody>
+          <a:bodyPr wrap="square">
+            <a:spAutoFit/>
+          </a:bodyPr>
+          <a:lstStyle/>
+          <a:p>
+            <a:pPr algn="ctr"/>
+            <a:r>
+              <a:rPr sz="3400" b="1" i="0">
                 <a:solidFill>
                   <a:srgbClr val="FFFFFF"/>
                 </a:solidFill>
                 <a:latin typeface="Arial"/>
               </a:rPr>
               <a:t>Deus, eu olho para Ti, eu não vou ser tragado</a:t>
-            </a:r>
-          </a:p>
-        </p:txBody>
-      </p:sp>
-      <p:sp>
-        <p:nvSpPr>
-          <p:cNvPr id="5" name="TextBox 4"/>
-          <p:cNvSpPr txBox="1"/>
-          <p:nvPr/>
-        </p:nvSpPr>
-        <p:spPr>
-          <a:xfrm>
-            <a:off x="594360" y="4251960"/>
-            <a:ext cx="11002975" cy="347472"/>
-          </a:xfrm>
-          <a:prstGeom prst="rect">
-            <a:avLst/>
-          </a:prstGeom>
-          <a:noFill/>
-        </p:spPr>
-        <p:txBody>
-          <a:bodyPr wrap="square">
-            <a:spAutoFit/>
-          </a:bodyPr>
-          <a:lstStyle/>
-          <a:p>
-            <a:pPr algn="ctr"/>
-            <a:r>
-              <a:rPr sz="2200" b="0" i="1">
-                <a:solidFill>
-                  <a:srgbClr val="8C8C8C"/>
-                </a:solidFill>
-                <a:latin typeface="Arial"/>
-              </a:rPr>
-              <a:t/>
             </a:r>
           </a:p>
         </p:txBody>
@@ -5032,23 +4892,23 @@
         </p:nvSpPr>
         <p:spPr>
           <a:xfrm>
-            <a:off x="594360" y="2258568"/>
-            <a:ext cx="11002975" cy="685800"/>
-          </a:xfrm>
-          <a:prstGeom prst="rect">
-            <a:avLst/>
-          </a:prstGeom>
-          <a:noFill/>
-        </p:spPr>
-        <p:txBody>
-          <a:bodyPr wrap="square">
-            <a:spAutoFit/>
-          </a:bodyPr>
-          <a:lstStyle/>
-          <a:p>
-            <a:pPr algn="ctr"/>
-            <a:r>
-              <a:rPr sz="3352" b="1" i="0">
+            <a:off x="640080" y="2052828"/>
+            <a:ext cx="10911535" cy="731520"/>
+          </a:xfrm>
+          <a:prstGeom prst="rect">
+            <a:avLst/>
+          </a:prstGeom>
+          <a:noFill/>
+        </p:spPr>
+        <p:txBody>
+          <a:bodyPr wrap="square">
+            <a:spAutoFit/>
+          </a:bodyPr>
+          <a:lstStyle/>
+          <a:p>
+            <a:pPr algn="ctr"/>
+            <a:r>
+              <a:rPr sz="3600" b="1" i="0">
                 <a:solidFill>
                   <a:srgbClr val="FFFFFF"/>
                 </a:solidFill>
@@ -5067,99 +4927,29 @@
         </p:nvSpPr>
         <p:spPr>
           <a:xfrm>
-            <a:off x="594360" y="2980944"/>
-            <a:ext cx="11002975" cy="347472"/>
-          </a:xfrm>
-          <a:prstGeom prst="rect">
-            <a:avLst/>
-          </a:prstGeom>
-          <a:noFill/>
-        </p:spPr>
-        <p:txBody>
-          <a:bodyPr wrap="square">
-            <a:spAutoFit/>
-          </a:bodyPr>
-          <a:lstStyle/>
-          <a:p>
-            <a:pPr algn="ctr"/>
-            <a:r>
-              <a:rPr sz="2200" b="0" i="1">
-                <a:solidFill>
-                  <a:srgbClr val="8C8C8C"/>
-                </a:solidFill>
-                <a:latin typeface="Arial"/>
-              </a:rPr>
-              <a:t/>
-            </a:r>
-          </a:p>
-        </p:txBody>
-      </p:sp>
-      <p:sp>
-        <p:nvSpPr>
-          <p:cNvPr id="4" name="TextBox 3"/>
-          <p:cNvSpPr txBox="1"/>
-          <p:nvPr/>
-        </p:nvSpPr>
-        <p:spPr>
-          <a:xfrm>
-            <a:off x="594360" y="3529584"/>
-            <a:ext cx="11002975" cy="685800"/>
-          </a:xfrm>
-          <a:prstGeom prst="rect">
-            <a:avLst/>
-          </a:prstGeom>
-          <a:noFill/>
-        </p:spPr>
-        <p:txBody>
-          <a:bodyPr wrap="square">
-            <a:spAutoFit/>
-          </a:bodyPr>
-          <a:lstStyle/>
-          <a:p>
-            <a:pPr algn="ctr"/>
-            <a:r>
-              <a:rPr sz="4400" b="1" i="0">
+            <a:off x="640080" y="2985516"/>
+            <a:ext cx="10911535" cy="731520"/>
+          </a:xfrm>
+          <a:prstGeom prst="rect">
+            <a:avLst/>
+          </a:prstGeom>
+          <a:noFill/>
+        </p:spPr>
+        <p:txBody>
+          <a:bodyPr wrap="square">
+            <a:spAutoFit/>
+          </a:bodyPr>
+          <a:lstStyle/>
+          <a:p>
+            <a:pPr algn="ctr"/>
+            <a:r>
+              <a:rPr sz="4800" b="1" i="0">
                 <a:solidFill>
                   <a:srgbClr val="FFFFFF"/>
                 </a:solidFill>
                 <a:latin typeface="Arial"/>
               </a:rPr>
               <a:t>Deus, eu olho para Ti</a:t>
-            </a:r>
-          </a:p>
-        </p:txBody>
-      </p:sp>
-      <p:sp>
-        <p:nvSpPr>
-          <p:cNvPr id="5" name="TextBox 4"/>
-          <p:cNvSpPr txBox="1"/>
-          <p:nvPr/>
-        </p:nvSpPr>
-        <p:spPr>
-          <a:xfrm>
-            <a:off x="594360" y="4251960"/>
-            <a:ext cx="11002975" cy="347472"/>
-          </a:xfrm>
-          <a:prstGeom prst="rect">
-            <a:avLst/>
-          </a:prstGeom>
-          <a:noFill/>
-        </p:spPr>
-        <p:txBody>
-          <a:bodyPr wrap="square">
-            <a:spAutoFit/>
-          </a:bodyPr>
-          <a:lstStyle/>
-          <a:p>
-            <a:pPr algn="ctr"/>
-            <a:r>
-              <a:rPr sz="2200" b="0" i="1">
-                <a:solidFill>
-                  <a:srgbClr val="8C8C8C"/>
-                </a:solidFill>
-                <a:latin typeface="Arial"/>
-              </a:rPr>
-              <a:t/>
             </a:r>
           </a:p>
         </p:txBody>
@@ -5198,23 +4988,23 @@
         </p:nvSpPr>
         <p:spPr>
           <a:xfrm>
-            <a:off x="594360" y="2258568"/>
-            <a:ext cx="11002975" cy="685800"/>
-          </a:xfrm>
-          <a:prstGeom prst="rect">
-            <a:avLst/>
-          </a:prstGeom>
-          <a:noFill/>
-        </p:spPr>
-        <p:txBody>
-          <a:bodyPr wrap="square">
-            <a:spAutoFit/>
-          </a:bodyPr>
-          <a:lstStyle/>
-          <a:p>
-            <a:pPr algn="ctr"/>
-            <a:r>
-              <a:rPr sz="4400" b="1" i="0">
+            <a:off x="640080" y="2052828"/>
+            <a:ext cx="10911535" cy="731520"/>
+          </a:xfrm>
+          <a:prstGeom prst="rect">
+            <a:avLst/>
+          </a:prstGeom>
+          <a:noFill/>
+        </p:spPr>
+        <p:txBody>
+          <a:bodyPr wrap="square">
+            <a:spAutoFit/>
+          </a:bodyPr>
+          <a:lstStyle/>
+          <a:p>
+            <a:pPr algn="ctr"/>
+            <a:r>
+              <a:rPr sz="4800" b="1" i="0">
                 <a:solidFill>
                   <a:srgbClr val="FFFFFF"/>
                 </a:solidFill>
@@ -5233,99 +5023,29 @@
         </p:nvSpPr>
         <p:spPr>
           <a:xfrm>
-            <a:off x="594360" y="2980944"/>
-            <a:ext cx="11002975" cy="347472"/>
-          </a:xfrm>
-          <a:prstGeom prst="rect">
-            <a:avLst/>
-          </a:prstGeom>
-          <a:noFill/>
-        </p:spPr>
-        <p:txBody>
-          <a:bodyPr wrap="square">
-            <a:spAutoFit/>
-          </a:bodyPr>
-          <a:lstStyle/>
-          <a:p>
-            <a:pPr algn="ctr"/>
-            <a:r>
-              <a:rPr sz="2200" b="0" i="1">
-                <a:solidFill>
-                  <a:srgbClr val="8C8C8C"/>
-                </a:solidFill>
-                <a:latin typeface="Arial"/>
-              </a:rPr>
-              <a:t/>
-            </a:r>
-          </a:p>
-        </p:txBody>
-      </p:sp>
-      <p:sp>
-        <p:nvSpPr>
-          <p:cNvPr id="4" name="TextBox 3"/>
-          <p:cNvSpPr txBox="1"/>
-          <p:nvPr/>
-        </p:nvSpPr>
-        <p:spPr>
-          <a:xfrm>
-            <a:off x="594360" y="3529584"/>
-            <a:ext cx="11002975" cy="685800"/>
-          </a:xfrm>
-          <a:prstGeom prst="rect">
-            <a:avLst/>
-          </a:prstGeom>
-          <a:noFill/>
-        </p:spPr>
-        <p:txBody>
-          <a:bodyPr wrap="square">
-            <a:spAutoFit/>
-          </a:bodyPr>
-          <a:lstStyle/>
-          <a:p>
-            <a:pPr algn="ctr"/>
-            <a:r>
-              <a:rPr sz="2933" b="1" i="0">
+            <a:off x="640080" y="2985516"/>
+            <a:ext cx="10911535" cy="731520"/>
+          </a:xfrm>
+          <a:prstGeom prst="rect">
+            <a:avLst/>
+          </a:prstGeom>
+          <a:noFill/>
+        </p:spPr>
+        <p:txBody>
+          <a:bodyPr wrap="square">
+            <a:spAutoFit/>
+          </a:bodyPr>
+          <a:lstStyle/>
+          <a:p>
+            <a:pPr algn="ctr"/>
+            <a:r>
+              <a:rPr sz="3200" b="1" i="0">
                 <a:solidFill>
                   <a:srgbClr val="FFFFFF"/>
                 </a:solidFill>
                 <a:latin typeface="Arial"/>
               </a:rPr>
               <a:t>Dê-me sabedoria; Tu sabes exatamente o que fazer</a:t>
-            </a:r>
-          </a:p>
-        </p:txBody>
-      </p:sp>
-      <p:sp>
-        <p:nvSpPr>
-          <p:cNvPr id="5" name="TextBox 4"/>
-          <p:cNvSpPr txBox="1"/>
-          <p:nvPr/>
-        </p:nvSpPr>
-        <p:spPr>
-          <a:xfrm>
-            <a:off x="594360" y="4251960"/>
-            <a:ext cx="11002975" cy="347472"/>
-          </a:xfrm>
-          <a:prstGeom prst="rect">
-            <a:avLst/>
-          </a:prstGeom>
-          <a:noFill/>
-        </p:spPr>
-        <p:txBody>
-          <a:bodyPr wrap="square">
-            <a:spAutoFit/>
-          </a:bodyPr>
-          <a:lstStyle/>
-          <a:p>
-            <a:pPr algn="ctr"/>
-            <a:r>
-              <a:rPr sz="2200" b="0" i="1">
-                <a:solidFill>
-                  <a:srgbClr val="8C8C8C"/>
-                </a:solidFill>
-                <a:latin typeface="Arial"/>
-              </a:rPr>
-              <a:t/>
             </a:r>
           </a:p>
         </p:txBody>
@@ -5364,23 +5084,23 @@
         </p:nvSpPr>
         <p:spPr>
           <a:xfrm>
-            <a:off x="594360" y="2258568"/>
-            <a:ext cx="11002975" cy="685800"/>
-          </a:xfrm>
-          <a:prstGeom prst="rect">
-            <a:avLst/>
-          </a:prstGeom>
-          <a:noFill/>
-        </p:spPr>
-        <p:txBody>
-          <a:bodyPr wrap="square">
-            <a:spAutoFit/>
-          </a:bodyPr>
-          <a:lstStyle/>
-          <a:p>
-            <a:pPr algn="ctr"/>
-            <a:r>
-              <a:rPr sz="4141" b="1" i="0">
+            <a:off x="640080" y="2052828"/>
+            <a:ext cx="10911535" cy="731520"/>
+          </a:xfrm>
+          <a:prstGeom prst="rect">
+            <a:avLst/>
+          </a:prstGeom>
+          <a:noFill/>
+        </p:spPr>
+        <p:txBody>
+          <a:bodyPr wrap="square">
+            <a:spAutoFit/>
+          </a:bodyPr>
+          <a:lstStyle/>
+          <a:p>
+            <a:pPr algn="ctr"/>
+            <a:r>
+              <a:rPr sz="4500" b="1" i="0">
                 <a:solidFill>
                   <a:srgbClr val="FFFFFF"/>
                 </a:solidFill>
@@ -5399,29 +5119,29 @@
         </p:nvSpPr>
         <p:spPr>
           <a:xfrm>
-            <a:off x="594360" y="2980944"/>
-            <a:ext cx="11002975" cy="347472"/>
-          </a:xfrm>
-          <a:prstGeom prst="rect">
-            <a:avLst/>
-          </a:prstGeom>
-          <a:noFill/>
-        </p:spPr>
-        <p:txBody>
-          <a:bodyPr wrap="square">
-            <a:spAutoFit/>
-          </a:bodyPr>
-          <a:lstStyle/>
-          <a:p>
-            <a:pPr algn="ctr"/>
-            <a:r>
-              <a:rPr sz="2200" b="0" i="1">
-                <a:solidFill>
-                  <a:srgbClr val="8C8C8C"/>
-                </a:solidFill>
-                <a:latin typeface="Arial"/>
-              </a:rPr>
-              <a:t/>
+            <a:off x="640080" y="2985516"/>
+            <a:ext cx="10911535" cy="731520"/>
+          </a:xfrm>
+          <a:prstGeom prst="rect">
+            <a:avLst/>
+          </a:prstGeom>
+          <a:noFill/>
+        </p:spPr>
+        <p:txBody>
+          <a:bodyPr wrap="square">
+            <a:spAutoFit/>
+          </a:bodyPr>
+          <a:lstStyle/>
+          <a:p>
+            <a:pPr algn="ctr"/>
+            <a:r>
+              <a:rPr sz="4600" b="1" i="0">
+                <a:solidFill>
+                  <a:srgbClr val="FFFFFF"/>
+                </a:solidFill>
+                <a:latin typeface="Arial"/>
+              </a:rPr>
+              <a:t>Eu vou Te amar Senhor, meu escudo</a:t>
             </a:r>
           </a:p>
         </p:txBody>
@@ -5434,29 +5154,29 @@
         </p:nvSpPr>
         <p:spPr>
           <a:xfrm>
-            <a:off x="594360" y="3529584"/>
-            <a:ext cx="11002975" cy="685800"/>
-          </a:xfrm>
-          <a:prstGeom prst="rect">
-            <a:avLst/>
-          </a:prstGeom>
-          <a:noFill/>
-        </p:spPr>
-        <p:txBody>
-          <a:bodyPr wrap="square">
-            <a:spAutoFit/>
-          </a:bodyPr>
-          <a:lstStyle/>
-          <a:p>
-            <a:pPr algn="ctr"/>
-            <a:r>
-              <a:rPr sz="4266" b="1" i="0">
-                <a:solidFill>
-                  <a:srgbClr val="FFFFFF"/>
-                </a:solidFill>
-                <a:latin typeface="Arial"/>
-              </a:rPr>
-              <a:t>Eu vou Te amar Senhor, meu escudo</a:t>
+            <a:off x="640080" y="4128516"/>
+            <a:ext cx="10911535" cy="310896"/>
+          </a:xfrm>
+          <a:prstGeom prst="rect">
+            <a:avLst/>
+          </a:prstGeom>
+          <a:noFill/>
+        </p:spPr>
+        <p:txBody>
+          <a:bodyPr wrap="square">
+            <a:spAutoFit/>
+          </a:bodyPr>
+          <a:lstStyle/>
+          <a:p>
+            <a:pPr algn="ctr"/>
+            <a:r>
+              <a:rPr sz="2000" b="0" i="0">
+                <a:solidFill>
+                  <a:srgbClr val="828282"/>
+                </a:solidFill>
+                <a:latin typeface="Arial"/>
+              </a:rPr>
+              <a:t>私のちから    私のとりで</a:t>
             </a:r>
           </a:p>
         </p:txBody>
@@ -5469,29 +5189,29 @@
         </p:nvSpPr>
         <p:spPr>
           <a:xfrm>
-            <a:off x="594360" y="4251960"/>
-            <a:ext cx="11002975" cy="347472"/>
-          </a:xfrm>
-          <a:prstGeom prst="rect">
-            <a:avLst/>
-          </a:prstGeom>
-          <a:noFill/>
-        </p:spPr>
-        <p:txBody>
-          <a:bodyPr wrap="square">
-            <a:spAutoFit/>
-          </a:bodyPr>
-          <a:lstStyle/>
-          <a:p>
-            <a:pPr algn="ctr"/>
-            <a:r>
-              <a:rPr sz="2200" b="0" i="1">
-                <a:solidFill>
-                  <a:srgbClr val="8C8C8C"/>
-                </a:solidFill>
-                <a:latin typeface="Arial"/>
-              </a:rPr>
-              <a:t/>
+            <a:off x="640080" y="4494276"/>
+            <a:ext cx="10911535" cy="310896"/>
+          </a:xfrm>
+          <a:prstGeom prst="rect">
+            <a:avLst/>
+          </a:prstGeom>
+          <a:noFill/>
+        </p:spPr>
+        <p:txBody>
+          <a:bodyPr wrap="square">
+            <a:spAutoFit/>
+          </a:bodyPr>
+          <a:lstStyle/>
+          <a:p>
+            <a:pPr algn="ctr"/>
+            <a:r>
+              <a:rPr sz="2000" b="0" i="0">
+                <a:solidFill>
+                  <a:srgbClr val="828282"/>
+                </a:solidFill>
+                <a:latin typeface="Arial"/>
+              </a:rPr>
+              <a:t>永遠に変わーらない  神を　愛します</a:t>
             </a:r>
           </a:p>
         </p:txBody>
@@ -5530,23 +5250,23 @@
         </p:nvSpPr>
         <p:spPr>
           <a:xfrm>
-            <a:off x="594360" y="2258568"/>
-            <a:ext cx="11002975" cy="685800"/>
-          </a:xfrm>
-          <a:prstGeom prst="rect">
-            <a:avLst/>
-          </a:prstGeom>
-          <a:noFill/>
-        </p:spPr>
-        <p:txBody>
-          <a:bodyPr wrap="square">
-            <a:spAutoFit/>
-          </a:bodyPr>
-          <a:lstStyle/>
-          <a:p>
-            <a:pPr algn="ctr"/>
-            <a:r>
-              <a:rPr sz="3060" b="1" i="0">
+            <a:off x="640080" y="2052828"/>
+            <a:ext cx="10911535" cy="731520"/>
+          </a:xfrm>
+          <a:prstGeom prst="rect">
+            <a:avLst/>
+          </a:prstGeom>
+          <a:noFill/>
+        </p:spPr>
+        <p:txBody>
+          <a:bodyPr wrap="square">
+            <a:spAutoFit/>
+          </a:bodyPr>
+          <a:lstStyle/>
+          <a:p>
+            <a:pPr algn="ctr"/>
+            <a:r>
+              <a:rPr sz="3300" b="1" i="0">
                 <a:solidFill>
                   <a:srgbClr val="FFFFFF"/>
                 </a:solidFill>
@@ -5565,29 +5285,29 @@
         </p:nvSpPr>
         <p:spPr>
           <a:xfrm>
-            <a:off x="594360" y="2980944"/>
-            <a:ext cx="11002975" cy="347472"/>
-          </a:xfrm>
-          <a:prstGeom prst="rect">
-            <a:avLst/>
-          </a:prstGeom>
-          <a:noFill/>
-        </p:spPr>
-        <p:txBody>
-          <a:bodyPr wrap="square">
-            <a:spAutoFit/>
-          </a:bodyPr>
-          <a:lstStyle/>
-          <a:p>
-            <a:pPr algn="ctr"/>
-            <a:r>
-              <a:rPr sz="2200" b="0" i="1">
-                <a:solidFill>
-                  <a:srgbClr val="8C8C8C"/>
-                </a:solidFill>
-                <a:latin typeface="Arial"/>
-              </a:rPr>
-              <a:t/>
+            <a:off x="640080" y="2985516"/>
+            <a:ext cx="10911535" cy="731520"/>
+          </a:xfrm>
+          <a:prstGeom prst="rect">
+            <a:avLst/>
+          </a:prstGeom>
+          <a:noFill/>
+        </p:spPr>
+        <p:txBody>
+          <a:bodyPr wrap="square">
+            <a:spAutoFit/>
+          </a:bodyPr>
+          <a:lstStyle/>
+          <a:p>
+            <a:pPr algn="ctr"/>
+            <a:r>
+              <a:rPr sz="3900" b="1" i="0">
+                <a:solidFill>
+                  <a:srgbClr val="FFFFFF"/>
+                </a:solidFill>
+                <a:latin typeface="Arial"/>
+              </a:rPr>
+              <a:t>Todos os meus dias eu vou Te amar, Deus</a:t>
             </a:r>
           </a:p>
         </p:txBody>
@@ -5600,29 +5320,29 @@
         </p:nvSpPr>
         <p:spPr>
           <a:xfrm>
-            <a:off x="594360" y="3529584"/>
-            <a:ext cx="11002975" cy="685800"/>
-          </a:xfrm>
-          <a:prstGeom prst="rect">
-            <a:avLst/>
-          </a:prstGeom>
-          <a:noFill/>
-        </p:spPr>
-        <p:txBody>
-          <a:bodyPr wrap="square">
-            <a:spAutoFit/>
-          </a:bodyPr>
-          <a:lstStyle/>
-          <a:p>
-            <a:pPr algn="ctr"/>
-            <a:r>
-              <a:rPr sz="3610" b="1" i="0">
-                <a:solidFill>
-                  <a:srgbClr val="FFFFFF"/>
-                </a:solidFill>
-                <a:latin typeface="Arial"/>
-              </a:rPr>
-              <a:t>Todos os meus dias eu vou Te amar, Deus</a:t>
+            <a:off x="640080" y="4128516"/>
+            <a:ext cx="10911535" cy="310896"/>
+          </a:xfrm>
+          <a:prstGeom prst="rect">
+            <a:avLst/>
+          </a:prstGeom>
+          <a:noFill/>
+        </p:spPr>
+        <p:txBody>
+          <a:bodyPr wrap="square">
+            <a:spAutoFit/>
+          </a:bodyPr>
+          <a:lstStyle/>
+          <a:p>
+            <a:pPr algn="ctr"/>
+            <a:r>
+              <a:rPr sz="2000" b="0" i="0">
+                <a:solidFill>
+                  <a:srgbClr val="828282"/>
+                </a:solidFill>
+                <a:latin typeface="Arial"/>
+              </a:rPr>
+              <a:t>私のちから    私のとりで</a:t>
             </a:r>
           </a:p>
         </p:txBody>
@@ -5635,29 +5355,29 @@
         </p:nvSpPr>
         <p:spPr>
           <a:xfrm>
-            <a:off x="594360" y="4251960"/>
-            <a:ext cx="11002975" cy="347472"/>
-          </a:xfrm>
-          <a:prstGeom prst="rect">
-            <a:avLst/>
-          </a:prstGeom>
-          <a:noFill/>
-        </p:spPr>
-        <p:txBody>
-          <a:bodyPr wrap="square">
-            <a:spAutoFit/>
-          </a:bodyPr>
-          <a:lstStyle/>
-          <a:p>
-            <a:pPr algn="ctr"/>
-            <a:r>
-              <a:rPr sz="2200" b="0" i="1">
-                <a:solidFill>
-                  <a:srgbClr val="8C8C8C"/>
-                </a:solidFill>
-                <a:latin typeface="Arial"/>
-              </a:rPr>
-              <a:t/>
+            <a:off x="640080" y="4494276"/>
+            <a:ext cx="10911535" cy="310896"/>
+          </a:xfrm>
+          <a:prstGeom prst="rect">
+            <a:avLst/>
+          </a:prstGeom>
+          <a:noFill/>
+        </p:spPr>
+        <p:txBody>
+          <a:bodyPr wrap="square">
+            <a:spAutoFit/>
+          </a:bodyPr>
+          <a:lstStyle/>
+          <a:p>
+            <a:pPr algn="ctr"/>
+            <a:r>
+              <a:rPr sz="2000" b="0" i="0">
+                <a:solidFill>
+                  <a:srgbClr val="828282"/>
+                </a:solidFill>
+                <a:latin typeface="Arial"/>
+              </a:rPr>
+              <a:t>永遠に変わーらない  神を　愛します</a:t>
             </a:r>
           </a:p>
         </p:txBody>
@@ -5696,23 +5416,23 @@
         </p:nvSpPr>
         <p:spPr>
           <a:xfrm>
-            <a:off x="594360" y="2258568"/>
-            <a:ext cx="11002975" cy="685800"/>
-          </a:xfrm>
-          <a:prstGeom prst="rect">
-            <a:avLst/>
-          </a:prstGeom>
-          <a:noFill/>
-        </p:spPr>
-        <p:txBody>
-          <a:bodyPr wrap="square">
-            <a:spAutoFit/>
-          </a:bodyPr>
-          <a:lstStyle/>
-          <a:p>
-            <a:pPr algn="ctr"/>
-            <a:r>
-              <a:rPr sz="4400" b="1" i="0">
+            <a:off x="640080" y="2052828"/>
+            <a:ext cx="10911535" cy="731520"/>
+          </a:xfrm>
+          <a:prstGeom prst="rect">
+            <a:avLst/>
+          </a:prstGeom>
+          <a:noFill/>
+        </p:spPr>
+        <p:txBody>
+          <a:bodyPr wrap="square">
+            <a:spAutoFit/>
+          </a:bodyPr>
+          <a:lstStyle/>
+          <a:p>
+            <a:pPr algn="ctr"/>
+            <a:r>
+              <a:rPr sz="4800" b="1" i="0">
                 <a:solidFill>
                   <a:srgbClr val="FFFFFF"/>
                 </a:solidFill>
@@ -5731,99 +5451,29 @@
         </p:nvSpPr>
         <p:spPr>
           <a:xfrm>
-            <a:off x="594360" y="2980944"/>
-            <a:ext cx="11002975" cy="347472"/>
-          </a:xfrm>
-          <a:prstGeom prst="rect">
-            <a:avLst/>
-          </a:prstGeom>
-          <a:noFill/>
-        </p:spPr>
-        <p:txBody>
-          <a:bodyPr wrap="square">
-            <a:spAutoFit/>
-          </a:bodyPr>
-          <a:lstStyle/>
-          <a:p>
-            <a:pPr algn="ctr"/>
-            <a:r>
-              <a:rPr sz="2200" b="0" i="1">
-                <a:solidFill>
-                  <a:srgbClr val="8C8C8C"/>
-                </a:solidFill>
-                <a:latin typeface="Arial"/>
-              </a:rPr>
-              <a:t/>
-            </a:r>
-          </a:p>
-        </p:txBody>
-      </p:sp>
-      <p:sp>
-        <p:nvSpPr>
-          <p:cNvPr id="4" name="TextBox 3"/>
-          <p:cNvSpPr txBox="1"/>
-          <p:nvPr/>
-        </p:nvSpPr>
-        <p:spPr>
-          <a:xfrm>
-            <a:off x="594360" y="3529584"/>
-            <a:ext cx="11002975" cy="685800"/>
-          </a:xfrm>
-          <a:prstGeom prst="rect">
-            <a:avLst/>
-          </a:prstGeom>
-          <a:noFill/>
-        </p:spPr>
-        <p:txBody>
-          <a:bodyPr wrap="square">
-            <a:spAutoFit/>
-          </a:bodyPr>
-          <a:lstStyle/>
-          <a:p>
-            <a:pPr algn="ctr"/>
-            <a:r>
-              <a:rPr sz="4400" b="1" i="0">
+            <a:off x="640080" y="2985516"/>
+            <a:ext cx="10911535" cy="731520"/>
+          </a:xfrm>
+          <a:prstGeom prst="rect">
+            <a:avLst/>
+          </a:prstGeom>
+          <a:noFill/>
+        </p:spPr>
+        <p:txBody>
+          <a:bodyPr wrap="square">
+            <a:spAutoFit/>
+          </a:bodyPr>
+          <a:lstStyle/>
+          <a:p>
+            <a:pPr algn="ctr"/>
+            <a:r>
+              <a:rPr sz="4800" b="1" i="0">
                 <a:solidFill>
                   <a:srgbClr val="FFFFFF"/>
                 </a:solidFill>
                 <a:latin typeface="Arial"/>
               </a:rPr>
               <a:t>Aleluia, nosso Deus reina</a:t>
-            </a:r>
-          </a:p>
-        </p:txBody>
-      </p:sp>
-      <p:sp>
-        <p:nvSpPr>
-          <p:cNvPr id="5" name="TextBox 4"/>
-          <p:cNvSpPr txBox="1"/>
-          <p:nvPr/>
-        </p:nvSpPr>
-        <p:spPr>
-          <a:xfrm>
-            <a:off x="594360" y="4251960"/>
-            <a:ext cx="11002975" cy="347472"/>
-          </a:xfrm>
-          <a:prstGeom prst="rect">
-            <a:avLst/>
-          </a:prstGeom>
-          <a:noFill/>
-        </p:spPr>
-        <p:txBody>
-          <a:bodyPr wrap="square">
-            <a:spAutoFit/>
-          </a:bodyPr>
-          <a:lstStyle/>
-          <a:p>
-            <a:pPr algn="ctr"/>
-            <a:r>
-              <a:rPr sz="2200" b="0" i="1">
-                <a:solidFill>
-                  <a:srgbClr val="8C8C8C"/>
-                </a:solidFill>
-                <a:latin typeface="Arial"/>
-              </a:rPr>
-              <a:t/>
             </a:r>
           </a:p>
         </p:txBody>
@@ -5862,23 +5512,23 @@
         </p:nvSpPr>
         <p:spPr>
           <a:xfrm>
-            <a:off x="594360" y="1837944"/>
-            <a:ext cx="11002975" cy="685800"/>
-          </a:xfrm>
-          <a:prstGeom prst="rect">
-            <a:avLst/>
-          </a:prstGeom>
-          <a:noFill/>
-        </p:spPr>
-        <p:txBody>
-          <a:bodyPr wrap="square">
-            <a:spAutoFit/>
-          </a:bodyPr>
-          <a:lstStyle/>
-          <a:p>
-            <a:pPr algn="ctr"/>
-            <a:r>
-              <a:rPr sz="4400" b="1" i="0">
+            <a:off x="640080" y="1650492"/>
+            <a:ext cx="10911535" cy="731520"/>
+          </a:xfrm>
+          <a:prstGeom prst="rect">
+            <a:avLst/>
+          </a:prstGeom>
+          <a:noFill/>
+        </p:spPr>
+        <p:txBody>
+          <a:bodyPr wrap="square">
+            <a:spAutoFit/>
+          </a:bodyPr>
+          <a:lstStyle/>
+          <a:p>
+            <a:pPr algn="ctr"/>
+            <a:r>
+              <a:rPr sz="4800" b="1" i="0">
                 <a:solidFill>
                   <a:srgbClr val="FFFFFF"/>
                 </a:solidFill>
@@ -5897,8 +5547,8 @@
         </p:nvSpPr>
         <p:spPr>
           <a:xfrm>
-            <a:off x="594360" y="2560320"/>
-            <a:ext cx="11002975" cy="384048"/>
+            <a:off x="640080" y="2418588"/>
+            <a:ext cx="10911535" cy="365760"/>
           </a:xfrm>
           <a:prstGeom prst="rect">
             <a:avLst/>
@@ -5915,7 +5565,7 @@
             <a:r>
               <a:rPr sz="2400" b="0" i="1">
                 <a:solidFill>
-                  <a:srgbClr val="B4B4B4"/>
+                  <a:srgbClr val="AAAAAA"/>
                 </a:solidFill>
                 <a:latin typeface="Arial"/>
               </a:rPr>
@@ -5932,8 +5582,78 @@
         </p:nvSpPr>
         <p:spPr>
           <a:xfrm>
-            <a:off x="594360" y="2980944"/>
-            <a:ext cx="11002975" cy="347472"/>
+            <a:off x="640080" y="2985516"/>
+            <a:ext cx="10911535" cy="731520"/>
+          </a:xfrm>
+          <a:prstGeom prst="rect">
+            <a:avLst/>
+          </a:prstGeom>
+          <a:noFill/>
+        </p:spPr>
+        <p:txBody>
+          <a:bodyPr wrap="square">
+            <a:spAutoFit/>
+          </a:bodyPr>
+          <a:lstStyle/>
+          <a:p>
+            <a:pPr algn="ctr"/>
+            <a:r>
+              <a:rPr sz="4800" b="1" i="0">
+                <a:solidFill>
+                  <a:srgbClr val="FFFFFF"/>
+                </a:solidFill>
+                <a:latin typeface="Arial"/>
+              </a:rPr>
+              <a:t>何にも         とらわれない</a:t>
+            </a:r>
+          </a:p>
+        </p:txBody>
+      </p:sp>
+      <p:sp>
+        <p:nvSpPr>
+          <p:cNvPr id="5" name="TextBox 4"/>
+          <p:cNvSpPr txBox="1"/>
+          <p:nvPr/>
+        </p:nvSpPr>
+        <p:spPr>
+          <a:xfrm>
+            <a:off x="640080" y="3753612"/>
+            <a:ext cx="10911535" cy="365760"/>
+          </a:xfrm>
+          <a:prstGeom prst="rect">
+            <a:avLst/>
+          </a:prstGeom>
+          <a:noFill/>
+        </p:spPr>
+        <p:txBody>
+          <a:bodyPr wrap="square">
+            <a:spAutoFit/>
+          </a:bodyPr>
+          <a:lstStyle/>
+          <a:p>
+            <a:pPr algn="ctr"/>
+            <a:r>
+              <a:rPr sz="2400" b="0" i="1">
+                <a:solidFill>
+                  <a:srgbClr val="AAAAAA"/>
+                </a:solidFill>
+                <a:latin typeface="Arial"/>
+              </a:rPr>
+              <a:t>nani ni mo   towararenai</a:t>
+            </a:r>
+          </a:p>
+        </p:txBody>
+      </p:sp>
+      <p:sp>
+        <p:nvSpPr>
+          <p:cNvPr id="6" name="TextBox 5"/>
+          <p:cNvSpPr txBox="1"/>
+          <p:nvPr/>
+        </p:nvSpPr>
+        <p:spPr>
+          <a:xfrm>
+            <a:off x="640080" y="4530852"/>
+            <a:ext cx="10911535" cy="310896"/>
           </a:xfrm>
           <a:prstGeom prst="rect">
             <a:avLst/>
@@ -5950,81 +5670,11 @@
             <a:r>
               <a:rPr sz="2000" b="0" i="1">
                 <a:solidFill>
-                  <a:srgbClr val="8C8C8C"/>
-                </a:solidFill>
-                <a:latin typeface="Arial"/>
-              </a:rPr>
-              <a:t/>
-            </a:r>
-          </a:p>
-        </p:txBody>
-      </p:sp>
-      <p:sp>
-        <p:nvSpPr>
-          <p:cNvPr id="5" name="TextBox 4"/>
-          <p:cNvSpPr txBox="1"/>
-          <p:nvPr/>
-        </p:nvSpPr>
-        <p:spPr>
-          <a:xfrm>
-            <a:off x="594360" y="3529584"/>
-            <a:ext cx="11002975" cy="685800"/>
-          </a:xfrm>
-          <a:prstGeom prst="rect">
-            <a:avLst/>
-          </a:prstGeom>
-          <a:noFill/>
-        </p:spPr>
-        <p:txBody>
-          <a:bodyPr wrap="square">
-            <a:spAutoFit/>
-          </a:bodyPr>
-          <a:lstStyle/>
-          <a:p>
-            <a:pPr algn="ctr"/>
-            <a:r>
-              <a:rPr sz="4400" b="1" i="0">
-                <a:solidFill>
-                  <a:srgbClr val="FFFFFF"/>
-                </a:solidFill>
-                <a:latin typeface="Arial"/>
-              </a:rPr>
-              <a:t>何にも         とらわれない</a:t>
-            </a:r>
-          </a:p>
-        </p:txBody>
-      </p:sp>
-      <p:sp>
-        <p:nvSpPr>
-          <p:cNvPr id="6" name="TextBox 5"/>
-          <p:cNvSpPr txBox="1"/>
-          <p:nvPr/>
-        </p:nvSpPr>
-        <p:spPr>
-          <a:xfrm>
-            <a:off x="594360" y="4251960"/>
-            <a:ext cx="11002975" cy="384048"/>
-          </a:xfrm>
-          <a:prstGeom prst="rect">
-            <a:avLst/>
-          </a:prstGeom>
-          <a:noFill/>
-        </p:spPr>
-        <p:txBody>
-          <a:bodyPr wrap="square">
-            <a:spAutoFit/>
-          </a:bodyPr>
-          <a:lstStyle/>
-          <a:p>
-            <a:pPr algn="ctr"/>
-            <a:r>
-              <a:rPr sz="2400" b="0" i="1">
-                <a:solidFill>
-                  <a:srgbClr val="B4B4B4"/>
-                </a:solidFill>
-                <a:latin typeface="Arial"/>
-              </a:rPr>
-              <a:t>nani ni mo   towararenai</a:t>
+                  <a:srgbClr val="828282"/>
+                </a:solidFill>
+                <a:latin typeface="Arial"/>
+              </a:rPr>
+              <a:t>Deus, Eu Olho Para Ti</a:t>
             </a:r>
           </a:p>
         </p:txBody>
@@ -6037,8 +5687,8 @@
         </p:nvSpPr>
         <p:spPr>
           <a:xfrm>
-            <a:off x="594360" y="4672584"/>
-            <a:ext cx="11002975" cy="347472"/>
+            <a:off x="640080" y="4896612"/>
+            <a:ext cx="10911535" cy="310896"/>
           </a:xfrm>
           <a:prstGeom prst="rect">
             <a:avLst/>
@@ -6055,11 +5705,11 @@
             <a:r>
               <a:rPr sz="2000" b="0" i="1">
                 <a:solidFill>
-                  <a:srgbClr val="8C8C8C"/>
-                </a:solidFill>
-                <a:latin typeface="Arial"/>
-              </a:rPr>
-              <a:t/>
+                  <a:srgbClr val="828282"/>
+                </a:solidFill>
+                <a:latin typeface="Arial"/>
+              </a:rPr>
+              <a:t>Deus, eu olho para Ti, eu não vou ser tragado</a:t>
             </a:r>
           </a:p>
         </p:txBody>

--- a/output_pptx/God_I_Look_to_You.pptx
+++ b/output_pptx/God_I_Look_to_You.pptx
@@ -4526,6 +4526,76 @@
           </a:p>
         </p:txBody>
       </p:sp>
+      <p:sp>
+        <p:nvSpPr>
+          <p:cNvPr id="4" name="TextBox 3"/>
+          <p:cNvSpPr txBox="1"/>
+          <p:nvPr/>
+        </p:nvSpPr>
+        <p:spPr>
+          <a:xfrm>
+            <a:off x="640080" y="4128516"/>
+            <a:ext cx="10911535" cy="310896"/>
+          </a:xfrm>
+          <a:prstGeom prst="rect">
+            <a:avLst/>
+          </a:prstGeom>
+          <a:noFill/>
+        </p:spPr>
+        <p:txBody>
+          <a:bodyPr wrap="square">
+            <a:spAutoFit/>
+          </a:bodyPr>
+          <a:lstStyle/>
+          <a:p>
+            <a:pPr algn="ctr"/>
+            <a:r>
+              <a:rPr sz="2000" b="0" i="0">
+                <a:solidFill>
+                  <a:srgbClr val="828282"/>
+                </a:solidFill>
+                <a:latin typeface="Arial"/>
+              </a:rPr>
+              <a:t>アレルヤ</a:t>
+            </a:r>
+          </a:p>
+        </p:txBody>
+      </p:sp>
+      <p:sp>
+        <p:nvSpPr>
+          <p:cNvPr id="5" name="TextBox 4"/>
+          <p:cNvSpPr txBox="1"/>
+          <p:nvPr/>
+        </p:nvSpPr>
+        <p:spPr>
+          <a:xfrm>
+            <a:off x="640080" y="4494276"/>
+            <a:ext cx="10911535" cy="310896"/>
+          </a:xfrm>
+          <a:prstGeom prst="rect">
+            <a:avLst/>
+          </a:prstGeom>
+          <a:noFill/>
+        </p:spPr>
+        <p:txBody>
+          <a:bodyPr wrap="square">
+            <a:spAutoFit/>
+          </a:bodyPr>
+          <a:lstStyle/>
+          <a:p>
+            <a:pPr algn="ctr"/>
+            <a:r>
+              <a:rPr sz="2000" b="0" i="0">
+                <a:solidFill>
+                  <a:srgbClr val="828282"/>
+                </a:solidFill>
+                <a:latin typeface="Arial"/>
+              </a:rPr>
+              <a:t>ハレルヤ、私たちの神は永遠に統治します</a:t>
+            </a:r>
+          </a:p>
+        </p:txBody>
+      </p:sp>
     </p:spTree>
   </p:cSld>
   <p:clrMapOvr>
@@ -4858,6 +4928,76 @@
           </a:p>
         </p:txBody>
       </p:sp>
+      <p:sp>
+        <p:nvSpPr>
+          <p:cNvPr id="4" name="TextBox 3"/>
+          <p:cNvSpPr txBox="1"/>
+          <p:nvPr/>
+        </p:nvSpPr>
+        <p:spPr>
+          <a:xfrm>
+            <a:off x="640080" y="4128516"/>
+            <a:ext cx="10911535" cy="310896"/>
+          </a:xfrm>
+          <a:prstGeom prst="rect">
+            <a:avLst/>
+          </a:prstGeom>
+          <a:noFill/>
+        </p:spPr>
+        <p:txBody>
+          <a:bodyPr wrap="square">
+            <a:spAutoFit/>
+          </a:bodyPr>
+          <a:lstStyle/>
+          <a:p>
+            <a:pPr algn="ctr"/>
+            <a:r>
+              <a:rPr sz="2000" b="0" i="0">
+                <a:solidFill>
+                  <a:srgbClr val="828282"/>
+                </a:solidFill>
+                <a:latin typeface="Arial"/>
+              </a:rPr>
+              <a:t>神よ、私はあなたを見つめます</a:t>
+            </a:r>
+          </a:p>
+        </p:txBody>
+      </p:sp>
+      <p:sp>
+        <p:nvSpPr>
+          <p:cNvPr id="5" name="TextBox 4"/>
+          <p:cNvSpPr txBox="1"/>
+          <p:nvPr/>
+        </p:nvSpPr>
+        <p:spPr>
+          <a:xfrm>
+            <a:off x="640080" y="4494276"/>
+            <a:ext cx="10911535" cy="310896"/>
+          </a:xfrm>
+          <a:prstGeom prst="rect">
+            <a:avLst/>
+          </a:prstGeom>
+          <a:noFill/>
+        </p:spPr>
+        <p:txBody>
+          <a:bodyPr wrap="square">
+            <a:spAutoFit/>
+          </a:bodyPr>
+          <a:lstStyle/>
+          <a:p>
+            <a:pPr algn="ctr"/>
+            <a:r>
+              <a:rPr sz="2000" b="0" i="0">
+                <a:solidFill>
+                  <a:srgbClr val="828282"/>
+                </a:solidFill>
+                <a:latin typeface="Arial"/>
+              </a:rPr>
+              <a:t>神よ、私はあなたを見つめます、私は飲み込まれません</a:t>
+            </a:r>
+          </a:p>
+        </p:txBody>
+      </p:sp>
     </p:spTree>
   </p:cSld>
   <p:clrMapOvr>
@@ -4954,6 +5094,76 @@
           </a:p>
         </p:txBody>
       </p:sp>
+      <p:sp>
+        <p:nvSpPr>
+          <p:cNvPr id="4" name="TextBox 3"/>
+          <p:cNvSpPr txBox="1"/>
+          <p:nvPr/>
+        </p:nvSpPr>
+        <p:spPr>
+          <a:xfrm>
+            <a:off x="640080" y="4128516"/>
+            <a:ext cx="10911535" cy="310896"/>
+          </a:xfrm>
+          <a:prstGeom prst="rect">
+            <a:avLst/>
+          </a:prstGeom>
+          <a:noFill/>
+        </p:spPr>
+        <p:txBody>
+          <a:bodyPr wrap="square">
+            <a:spAutoFit/>
+          </a:bodyPr>
+          <a:lstStyle/>
+          <a:p>
+            <a:pPr algn="ctr"/>
+            <a:r>
+              <a:rPr sz="2000" b="0" i="0">
+                <a:solidFill>
+                  <a:srgbClr val="828282"/>
+                </a:solidFill>
+                <a:latin typeface="Arial"/>
+              </a:rPr>
+              <a:t>あなたが見ているように物事を見る視力をください</a:t>
+            </a:r>
+          </a:p>
+        </p:txBody>
+      </p:sp>
+      <p:sp>
+        <p:nvSpPr>
+          <p:cNvPr id="5" name="TextBox 4"/>
+          <p:cNvSpPr txBox="1"/>
+          <p:nvPr/>
+        </p:nvSpPr>
+        <p:spPr>
+          <a:xfrm>
+            <a:off x="640080" y="4494276"/>
+            <a:ext cx="10911535" cy="310896"/>
+          </a:xfrm>
+          <a:prstGeom prst="rect">
+            <a:avLst/>
+          </a:prstGeom>
+          <a:noFill/>
+        </p:spPr>
+        <p:txBody>
+          <a:bodyPr wrap="square">
+            <a:spAutoFit/>
+          </a:bodyPr>
+          <a:lstStyle/>
+          <a:p>
+            <a:pPr algn="ctr"/>
+            <a:r>
+              <a:rPr sz="2000" b="0" i="0">
+                <a:solidFill>
+                  <a:srgbClr val="828282"/>
+                </a:solidFill>
+                <a:latin typeface="Arial"/>
+              </a:rPr>
+              <a:t>神よ、私はあなたを見つめます</a:t>
+            </a:r>
+          </a:p>
+        </p:txBody>
+      </p:sp>
     </p:spTree>
   </p:cSld>
   <p:clrMapOvr>
@@ -5050,6 +5260,76 @@
           </a:p>
         </p:txBody>
       </p:sp>
+      <p:sp>
+        <p:nvSpPr>
+          <p:cNvPr id="4" name="TextBox 3"/>
+          <p:cNvSpPr txBox="1"/>
+          <p:nvPr/>
+        </p:nvSpPr>
+        <p:spPr>
+          <a:xfrm>
+            <a:off x="640080" y="4128516"/>
+            <a:ext cx="10911535" cy="310896"/>
+          </a:xfrm>
+          <a:prstGeom prst="rect">
+            <a:avLst/>
+          </a:prstGeom>
+          <a:noFill/>
+        </p:spPr>
+        <p:txBody>
+          <a:bodyPr wrap="square">
+            <a:spAutoFit/>
+          </a:bodyPr>
+          <a:lstStyle/>
+          <a:p>
+            <a:pPr algn="ctr"/>
+            <a:r>
+              <a:rPr sz="2000" b="0" i="0">
+                <a:solidFill>
+                  <a:srgbClr val="828282"/>
+                </a:solidFill>
+                <a:latin typeface="Arial"/>
+              </a:rPr>
+              <a:t>あなたは私の助けが来る場所です</a:t>
+            </a:r>
+          </a:p>
+        </p:txBody>
+      </p:sp>
+      <p:sp>
+        <p:nvSpPr>
+          <p:cNvPr id="5" name="TextBox 4"/>
+          <p:cNvSpPr txBox="1"/>
+          <p:nvPr/>
+        </p:nvSpPr>
+        <p:spPr>
+          <a:xfrm>
+            <a:off x="640080" y="4494276"/>
+            <a:ext cx="10911535" cy="310896"/>
+          </a:xfrm>
+          <a:prstGeom prst="rect">
+            <a:avLst/>
+          </a:prstGeom>
+          <a:noFill/>
+        </p:spPr>
+        <p:txBody>
+          <a:bodyPr wrap="square">
+            <a:spAutoFit/>
+          </a:bodyPr>
+          <a:lstStyle/>
+          <a:p>
+            <a:pPr algn="ctr"/>
+            <a:r>
+              <a:rPr sz="2000" b="0" i="0">
+                <a:solidFill>
+                  <a:srgbClr val="828282"/>
+                </a:solidFill>
+                <a:latin typeface="Arial"/>
+              </a:rPr>
+              <a:t>私に知恵をください。あなたは何をすべきか正確に知っています</a:t>
+            </a:r>
+          </a:p>
+        </p:txBody>
+      </p:sp>
     </p:spTree>
   </p:cSld>
   <p:clrMapOvr>
@@ -5474,6 +5754,76 @@
                 <a:latin typeface="Arial"/>
               </a:rPr>
               <a:t>Aleluia, nosso Deus reina</a:t>
+            </a:r>
+          </a:p>
+        </p:txBody>
+      </p:sp>
+      <p:sp>
+        <p:nvSpPr>
+          <p:cNvPr id="4" name="TextBox 3"/>
+          <p:cNvSpPr txBox="1"/>
+          <p:nvPr/>
+        </p:nvSpPr>
+        <p:spPr>
+          <a:xfrm>
+            <a:off x="640080" y="4128516"/>
+            <a:ext cx="10911535" cy="310896"/>
+          </a:xfrm>
+          <a:prstGeom prst="rect">
+            <a:avLst/>
+          </a:prstGeom>
+          <a:noFill/>
+        </p:spPr>
+        <p:txBody>
+          <a:bodyPr wrap="square">
+            <a:spAutoFit/>
+          </a:bodyPr>
+          <a:lstStyle/>
+          <a:p>
+            <a:pPr algn="ctr"/>
+            <a:r>
+              <a:rPr sz="2000" b="0" i="0">
+                <a:solidFill>
+                  <a:srgbClr val="828282"/>
+                </a:solidFill>
+                <a:latin typeface="Arial"/>
+              </a:rPr>
+              <a:t>ハレルヤ、私たちの神は統治します</a:t>
+            </a:r>
+          </a:p>
+        </p:txBody>
+      </p:sp>
+      <p:sp>
+        <p:nvSpPr>
+          <p:cNvPr id="5" name="TextBox 4"/>
+          <p:cNvSpPr txBox="1"/>
+          <p:nvPr/>
+        </p:nvSpPr>
+        <p:spPr>
+          <a:xfrm>
+            <a:off x="640080" y="4494276"/>
+            <a:ext cx="10911535" cy="310896"/>
+          </a:xfrm>
+          <a:prstGeom prst="rect">
+            <a:avLst/>
+          </a:prstGeom>
+          <a:noFill/>
+        </p:spPr>
+        <p:txBody>
+          <a:bodyPr wrap="square">
+            <a:spAutoFit/>
+          </a:bodyPr>
+          <a:lstStyle/>
+          <a:p>
+            <a:pPr algn="ctr"/>
+            <a:r>
+              <a:rPr sz="2000" b="0" i="0">
+                <a:solidFill>
+                  <a:srgbClr val="828282"/>
+                </a:solidFill>
+                <a:latin typeface="Arial"/>
+              </a:rPr>
+              <a:t>ハレルヤ、私たちの神は統治します</a:t>
             </a:r>
           </a:p>
         </p:txBody>
